--- a/Progression_P1/P1-L12_Review_and_Unit_Assessment_Healthy_Lifestyles.pptx
+++ b/Progression_P1/P1-L12_Review_and_Unit_Assessment_Healthy_Lifestyles.pptx
@@ -626,7 +626,11 @@
           <a:lstStyle/>
           <a:p>
             <a:r>
-              <a:rPr lang="en-US" dirty="0"/>
+              <a:rPr lang="ar-SA" dirty="0">
+                <a:latin typeface="Amiri" pitchFamily="2" charset="-78"/>
+                <a:ea typeface="Amiri" pitchFamily="2" charset="-78"/>
+                <a:cs typeface="Amiri" pitchFamily="2" charset="-78"/>
+              </a:rPr>
               <a:t>LISTENING TEXT 1 · QUESTIONS 5–8 (website Part A, 20 marks). Before listening: label each question S / C / R / P / O and write the cue word (P1-L10). Questions 5–6 are conditionals: listen for إِذَا and the sa- result. Each recording may be played twice; students answer after the second reading.
 SCRIPT: يَقُولُ خَبِيرُ التَّغْذِيَةِ: الطَّعَامُ الصِّحِّيُّ غَنِيٌّ بِالخُضَارِ وَالبُرُوتِينِ، وَيَحْتَوِي عَلَى أَلْيَافٍ كَثِيرَةٍ. يُوصَى بِتَنَاوُلِ خَمْسِ حِصَصٍ مِنَ الفَوَاكِهِ وَالخُضَارِ يَوْمِيًّا. وَتُشِيرُ الدِّرَاسَاتُ إِلَى أَنَّ هٰذَا النِّظَامَ يُقَلِّلُ خَطَرَ أَمْرَاضِ القَلْبِ بِنِسْبَةِ ثَلَاثِينَ بِالْمِئَةِ. وَإِذَا قَلَّلْتَ السُّكَّرَ، سَتَنْخَفِضُ نِسْبَةُ الإِصَابَةِ بِالسُّكَّرِيِّ. وَإِذَا شَرِبْتَ المَاءَ بِانْتِظَامٍ، سَيَتَحَسَّنُ تَرْكِيزُكَ. كَمَا يُقَوِّي الطَّعَامُ المُتَوَازِنُ جِهَازَ المَنَاعَةِ. وَعِنْدَ المُقَارَنَةِ، يَبْقَى الطَّعَامُ الطَّازَجُ أَفْضَلَ مِنَ المُصَنَّعِ.
 Private chat: 4 letters.</a:t>
@@ -716,7 +720,11 @@
           <a:lstStyle/>
           <a:p>
             <a:r>
-              <a:rPr lang="en-US" dirty="0"/>
+              <a:rPr lang="ar-SA" dirty="0">
+                <a:latin typeface="Amiri" pitchFamily="2" charset="-78"/>
+                <a:ea typeface="Amiri" pitchFamily="2" charset="-78"/>
+                <a:cs typeface="Amiri" pitchFamily="2" charset="-78"/>
+              </a:rPr>
               <a:t>Mark /4. Reveal the script only after the attempt; ask which cue word (بِالْمِئَةِ · إِذَا · يُوصَى · a passive vowel · a speaker’s name) proved each answer.</a:t>
             </a:r>
             <a:endParaRPr lang="en-US" dirty="0"/>
@@ -804,7 +812,11 @@
           <a:lstStyle/>
           <a:p>
             <a:r>
-              <a:rPr lang="en-US" dirty="0"/>
+              <a:rPr lang="ar-SA" dirty="0">
+                <a:latin typeface="Amiri" pitchFamily="2" charset="-78"/>
+                <a:ea typeface="Amiri" pitchFamily="2" charset="-78"/>
+                <a:cs typeface="Amiri" pitchFamily="2" charset="-78"/>
+              </a:rPr>
               <a:t>LISTENING TEXT 2 · 6 QUESTIONS (website Part A, 20 marks). Before listening: label each question S / C / R / P / O and write the cue word (P1-L10). Attribution: write S / L / both beside each question while listening. Each recording may be played twice; students answer after the second reading.
 SCRIPT: سَامِي: أُعَانِي مِنَ التَّوَتُّرِ قَبْلَ الامْتِحَانَاتِ، وَإِذَا لَمْ أَنَمْ جَيِّدًا يَزْدَادُ قَلَقِي. لَيْلَى: وَأَنَا أَتَغَلَّبُ عَلَى الضَّغْطِ بِالرِّيَاضَةِ وَالتَّنْظِيمِ. سَامِي: أَتَّفِقُ مَعَكِ؛ فَالرِّيَاضَةُ تُحَسِّنُ مِزَاجِي أَيْضًا. لَيْلَى: لٰكِنَّنِي لَا أُحِبُّ السَّهَرَ عَلَى الشَّاشَاتِ، فَهُوَ يُعِيقُ نَوْمِي. سَامِي: نَحْنُ الِاثْنَانِ نَحْتَاجُ إِلَى تَوَازُنٍ أَفْضَلَ بَيْنَ الدِّرَاسَةِ وَالرَّاحَةِ. لَيْلَى: نَعَمْ، وَإِذَا نَظَّمْنَا وَقْتَنَا، سَنَشْعُرُ بِتَحَسُّنٍ.
 Private chat: 6 letters.</a:t>
@@ -894,7 +906,11 @@
           <a:lstStyle/>
           <a:p>
             <a:r>
-              <a:rPr lang="en-US" dirty="0"/>
+              <a:rPr lang="ar-SA" dirty="0">
+                <a:latin typeface="Amiri" pitchFamily="2" charset="-78"/>
+                <a:ea typeface="Amiri" pitchFamily="2" charset="-78"/>
+                <a:cs typeface="Amiri" pitchFamily="2" charset="-78"/>
+              </a:rPr>
               <a:t>Mark /6. Reveal the script only after the attempt; ask which cue word (بِالْمِئَةِ · إِذَا · يُوصَى · a passive vowel · a speaker’s name) proved each answer.</a:t>
             </a:r>
             <a:endParaRPr lang="en-US" dirty="0"/>
@@ -982,7 +998,11 @@
           <a:lstStyle/>
           <a:p>
             <a:r>
-              <a:rPr lang="en-US" dirty="0"/>
+              <a:rPr lang="ar-SA" dirty="0">
+                <a:latin typeface="Amiri" pitchFamily="2" charset="-78"/>
+                <a:ea typeface="Amiri" pitchFamily="2" charset="-78"/>
+                <a:cs typeface="Amiri" pitchFamily="2" charset="-78"/>
+              </a:rPr>
               <a:t>LISTENING TEXT 3 · 6 QUESTIONS (website Part A, 20 marks). Before listening: label each question S / C / R / P / O and write the cue word (P1-L10). Listen for the passive يُشَخَّصُ and the harm verbs يُلْحِقُ الضَّرَرَ بِـ · يُعِيقُ · يُضْعِفُ. Each recording may be played twice; students answer after the second reading.
 SCRIPT: تَقُولُ الخَبِيرَةُ الصِّحِّيَّةُ: يُلْحِقُ التَّدْخِينُ ضَرَرًا بَالِغًا بِالرِّئَتَيْنِ، وَيَزِيدُ مِنْ خَطَرِ السَّرَطَانِ. وَيُشَخَّصُ كَثِيرٌ مِنَ الحَالَاتِ مُتَأَخِّرًا لِأَنَّ الأَعْرَاضَ تَظْهَرُ بِبُطْءٍ. وَإِذَا أَقْلَعَ الشَّخْصُ عَنِ التَّدْخِينِ، تَتَحَسَّنُ وَظَائِفُ الرِّئَةِ تَدْرِيجِيًّا. أَمَّا إِدْمَانُ الشَّاشَاتِ فَيُعِيقُ النَّوْمَ وَيُضْعِفُ التَّرْكِيزَ. وَيُنْصَحُ بِفَتْرَةٍ بِلَا شَاشَاتٍ قَبْلَ النَّوْمِ. وَلَيْسَ الهَدَفُ إِخَافَةَ النَّاسِ، بَلْ تَمْكِينَهُمْ مِنْ قَرَارٍ أَفْضَلَ.
 Private chat: 6 letters.</a:t>
@@ -1072,7 +1092,11 @@
           <a:lstStyle/>
           <a:p>
             <a:r>
-              <a:rPr lang="en-US" dirty="0"/>
+              <a:rPr lang="ar-SA" dirty="0">
+                <a:latin typeface="Amiri" pitchFamily="2" charset="-78"/>
+                <a:ea typeface="Amiri" pitchFamily="2" charset="-78"/>
+                <a:cs typeface="Amiri" pitchFamily="2" charset="-78"/>
+              </a:rPr>
               <a:t>Mark /6. Reveal the script only after the attempt; ask which cue word (بِالْمِئَةِ · إِذَا · يُوصَى · a passive vowel · a speaker’s name) proved each answer.</a:t>
             </a:r>
             <a:endParaRPr lang="en-US" dirty="0"/>
@@ -1512,7 +1536,11 @@
           <a:lstStyle/>
           <a:p>
             <a:r>
-              <a:rPr lang="en-US" dirty="0"/>
+              <a:rPr lang="ar-SA" dirty="0">
+                <a:latin typeface="Amiri" pitchFamily="2" charset="-78"/>
+                <a:ea typeface="Amiri" pitchFamily="2" charset="-78"/>
+                <a:cs typeface="Amiri" pitchFamily="2" charset="-78"/>
+              </a:rPr>
               <a:t>WELCOME (1 min) — while students join.
 • Greet each student by name as they arrive: السَّلَامُ عَلَيْكُمْ. Take the register (Pastoral Tracker: attendance 0/1).
 • 2-MINUTE CHECK-IN (SEND training): a private chat to any student who seemed unsettled last lesson — “Are you okay today? 👍 / 👎”.
@@ -1693,7 +1721,11 @@
           <a:lstStyle/>
           <a:p>
             <a:r>
-              <a:rPr lang="en-US" dirty="0"/>
+              <a:rPr lang="ar-SA" dirty="0">
+                <a:latin typeface="Amiri" pitchFamily="2" charset="-78"/>
+                <a:ea typeface="Amiri" pitchFamily="2" charset="-78"/>
+                <a:cs typeface="Amiri" pitchFamily="2" charset="-78"/>
+              </a:rPr>
               <a:t>WRITING QUESTION 1 (website, 5 marks): one mark per field completed accurately in Arabic (a phrase is enough). Field 4 rewards يُعَانِي مِنْ; field 5 must be a Type 1 conditional (إِذَا + past → سَـ) for the mark. Students may describe a fictional student.</a:t>
             </a:r>
             <a:endParaRPr lang="en-US" dirty="0"/>
@@ -1869,7 +1901,11 @@
           <a:lstStyle/>
           <a:p>
             <a:r>
-              <a:rPr lang="en-US" dirty="0"/>
+              <a:rPr lang="ar-SA" dirty="0">
+                <a:latin typeface="Amiri" pitchFamily="2" charset="-78"/>
+                <a:ea typeface="Amiri" pitchFamily="2" charset="-78"/>
+                <a:cs typeface="Amiri" pitchFamily="2" charset="-78"/>
+              </a:rPr>
               <a:t>ROLE PLAY (website, 4 marks). Teacher plays a school health adviser: مَرْحَبًا، كَيْفَ يُمْكِنُنِي مُسَاعَدَتُكَ؟ صِفْ لِي نِظَامَكَ الغِذَائِيَّ. Model answers: طَعَامِي غَنِيٌّ بِالخُضَارِ وَيَحْتَوِي عَلَى بُرُوتِينٍ … · أَتَمَرَّنُ ثَلَاثَ مَرَّاتٍ فِي الأُسْبُوعِ … · أُعَانِي مِنَ السَّهَرِ قَبْلَ الامْتِحَانَاتِ … · إِذَا نِمْتُ مُبَكِّرًا، هَلْ سَيَتَحَسَّنُ تَرْكِيزِي؟ Website mark scheme: Communication (2): all four prompts are addressed clearly and relevantly. Accuracy (2): prompt 3 uses يُعَانِي مِنْ and prompt 4 requests a conditional; both are formed correctly. Diet is described with غَنِيٌّ بِـ or يَحْتَوِي عَلَى. To a girl: صِفِي · قُولِي · اُطْلُبِي.</a:t>
             </a:r>
             <a:endParaRPr lang="en-US" dirty="0"/>
@@ -1957,7 +1993,11 @@
           <a:lstStyle/>
           <a:p>
             <a:r>
-              <a:rPr lang="en-US" dirty="0"/>
+              <a:rPr lang="ar-SA" dirty="0">
+                <a:latin typeface="Amiri" pitchFamily="2" charset="-78"/>
+                <a:ea typeface="Amiri" pitchFamily="2" charset="-78"/>
+                <a:cs typeface="Amiri" pitchFamily="2" charset="-78"/>
+              </a:rPr>
               <a:t>TOPIC CONVERSATION (website, 6 marks): answer · reason · conditional (P1-L11). Website mark scheme: Communication (3): answers are developed with point, reason and example. Quality of language (3): a Type 1 conditional appears spontaneously in the stress or habit-change question. A Form II benefit verb and academic health vocabulary raise the quality; record if the candidate avoids the conditional by using the present. Allow time-buying and repair phrases (دَعْنِي أُفَكِّرُ · عَفْوًا، أَقْصِدُ). To a girl: تَتَعَامَلِينَ · بِإِمْكَانِكِ · سَتَخْتَارِينَ · تُوصِينَ. ORGANISATION: one-to-one while others finish writing, or trusted pairs with the teacher as examiner.</a:t>
             </a:r>
             <a:endParaRPr lang="en-US" dirty="0"/>
@@ -2671,7 +2711,11 @@
           <a:lstStyle/>
           <a:p>
             <a:r>
-              <a:rPr lang="en-US" dirty="0"/>
+              <a:rPr lang="ar-SA" dirty="0">
+                <a:latin typeface="Amiri" pitchFamily="2" charset="-78"/>
+                <a:ea typeface="Amiri" pitchFamily="2" charset="-78"/>
+                <a:cs typeface="Amiri" pitchFamily="2" charset="-78"/>
+              </a:rPr>
               <a:t>REVIEW (website twelve-question grammar spine, correct answers): مَارَسْتَ · سَتَنْخَفِضُ نِسْبَةُ التَّوَتُّرِ · يُشَخَّصُ المَرِيضُ · بِتَنَاوُلِ · بِـ · إِلَى · مِنَ · عَلَى · أَنَّ النَّوْمَ · عَادَاتٌ صِحِّيَّةٌ · أَنْفَعُ · يُقَوِّي. Close the vocabulary vault during each section.</a:t>
             </a:r>
             <a:endParaRPr lang="en-US" dirty="0"/>
@@ -2847,7 +2891,11 @@
           <a:lstStyle/>
           <a:p>
             <a:r>
-              <a:rPr lang="en-US" dirty="0"/>
+              <a:rPr lang="ar-SA" dirty="0">
+                <a:latin typeface="Amiri" pitchFamily="2" charset="-78"/>
+                <a:ea typeface="Amiri" pitchFamily="2" charset="-78"/>
+                <a:cs typeface="Amiri" pitchFamily="2" charset="-78"/>
+              </a:rPr>
               <a:t>LISTENING TEXT 1 · QUESTIONS 1–4 (website Part A, 20 marks). Before listening: label each question S / C / R / P / O and write the cue word (P1-L10). Question 4 is a statistic: ثَلَاثِينَ بِالْمِئَةِ = 30%. Each recording may be played twice; students answer after the second reading.
 SCRIPT: يَقُولُ خَبِيرُ التَّغْذِيَةِ: الطَّعَامُ الصِّحِّيُّ غَنِيٌّ بِالخُضَارِ وَالبُرُوتِينِ، وَيَحْتَوِي عَلَى أَلْيَافٍ كَثِيرَةٍ. يُوصَى بِتَنَاوُلِ خَمْسِ حِصَصٍ مِنَ الفَوَاكِهِ وَالخُضَارِ يَوْمِيًّا. وَتُشِيرُ الدِّرَاسَاتُ إِلَى أَنَّ هٰذَا النِّظَامَ يُقَلِّلُ خَطَرَ أَمْرَاضِ القَلْبِ بِنِسْبَةِ ثَلَاثِينَ بِالْمِئَةِ. وَإِذَا قَلَّلْتَ السُّكَّرَ، سَتَنْخَفِضُ نِسْبَةُ الإِصَابَةِ بِالسُّكَّرِيِّ. وَإِذَا شَرِبْتَ المَاءَ بِانْتِظَامٍ، سَيَتَحَسَّنُ تَرْكِيزُكَ. كَمَا يُقَوِّي الطَّعَامُ المُتَوَازِنُ جِهَازَ المَنَاعَةِ. وَعِنْدَ المُقَارَنَةِ، يَبْقَى الطَّعَامُ الطَّازَجُ أَفْضَلَ مِنَ المُصَنَّعِ.
 Private chat: 4 letters.</a:t>
@@ -2937,7 +2985,11 @@
           <a:lstStyle/>
           <a:p>
             <a:r>
-              <a:rPr lang="en-US" dirty="0"/>
+              <a:rPr lang="ar-SA" dirty="0">
+                <a:latin typeface="Amiri" pitchFamily="2" charset="-78"/>
+                <a:ea typeface="Amiri" pitchFamily="2" charset="-78"/>
+                <a:cs typeface="Amiri" pitchFamily="2" charset="-78"/>
+              </a:rPr>
               <a:t>Mark /4. Reveal the script only after the attempt; ask which cue word (بِالْمِئَةِ · إِذَا · يُوصَى · a passive vowel · a speaker’s name) proved each answer.</a:t>
             </a:r>
             <a:endParaRPr lang="en-US" dirty="0"/>
@@ -3421,6 +3473,7 @@
                   <a:srgbClr val="D4AF37"/>
                 </a:solidFill>
                 <a:latin typeface="Amiri" pitchFamily="2" charset="-78"/>
+                <a:ea typeface="Amiri" pitchFamily="2" charset="-78"/>
                 <a:cs typeface="Amiri" pitchFamily="2" charset="-78"/>
               </a:rPr>
               <a:t>م</a:t>
@@ -3627,6 +3680,7 @@
                   <a:srgbClr val="D4AF37"/>
                 </a:solidFill>
                 <a:latin typeface="Amiri" pitchFamily="2" charset="-78"/>
+                <a:ea typeface="Amiri" pitchFamily="2" charset="-78"/>
                 <a:cs typeface="Amiri" pitchFamily="2" charset="-78"/>
               </a:rPr>
               <a:t>المُرَاجَعَةُ وَتَقْيِيمُ الوَحْدَةِ</a:t>
@@ -4084,6 +4138,7 @@
                   <a:srgbClr val="D4AF37"/>
                 </a:solidFill>
                 <a:latin typeface="Amiri" pitchFamily="2" charset="-78"/>
+                <a:ea typeface="Amiri" pitchFamily="2" charset="-78"/>
                 <a:cs typeface="Amiri" pitchFamily="2" charset="-78"/>
               </a:rPr>
               <a:t>م</a:t>
@@ -4404,6 +4459,7 @@
                   <a:srgbClr val="8A6D1E"/>
                 </a:solidFill>
                 <a:latin typeface="Amiri" pitchFamily="2" charset="-78"/>
+                <a:ea typeface="Amiri" pitchFamily="2" charset="-78"/>
                 <a:cs typeface="Amiri" pitchFamily="2" charset="-78"/>
               </a:rPr>
               <a:t>الاِسْتِمَاعُ</a:t>
@@ -6327,6 +6383,7 @@
                   <a:srgbClr val="D4AF37"/>
                 </a:solidFill>
                 <a:latin typeface="Amiri" pitchFamily="2" charset="-78"/>
+                <a:ea typeface="Amiri" pitchFamily="2" charset="-78"/>
                 <a:cs typeface="Amiri" pitchFamily="2" charset="-78"/>
               </a:rPr>
               <a:t>م</a:t>
@@ -6647,6 +6704,7 @@
                   <a:srgbClr val="8A6D1E"/>
                 </a:solidFill>
                 <a:latin typeface="Amiri" pitchFamily="2" charset="-78"/>
+                <a:ea typeface="Amiri" pitchFamily="2" charset="-78"/>
                 <a:cs typeface="Amiri" pitchFamily="2" charset="-78"/>
               </a:rPr>
               <a:t>الإِجَابَاتُ</a:t>
@@ -7188,6 +7246,7 @@
                   <a:srgbClr val="8A6D1E"/>
                 </a:solidFill>
                 <a:latin typeface="Amiri" pitchFamily="2" charset="-78"/>
+                <a:ea typeface="Amiri" pitchFamily="2" charset="-78"/>
                 <a:cs typeface="Amiri" pitchFamily="2" charset="-78"/>
               </a:rPr>
               <a:t>إِذَا قَلَّلْتَ السُّكَّرَ، سَتَنْخَفِضُ نِسْبَةُ الإِصَابَةِ بِالسُّكَّرِيِّ.</a:t>
@@ -7691,6 +7750,7 @@
                   <a:srgbClr val="8A6D1E"/>
                 </a:solidFill>
                 <a:latin typeface="Amiri" pitchFamily="2" charset="-78"/>
+                <a:ea typeface="Amiri" pitchFamily="2" charset="-78"/>
                 <a:cs typeface="Amiri" pitchFamily="2" charset="-78"/>
               </a:rPr>
               <a:t>إِذَا شَرِبْتَ المَاءَ بِانْتِظَامٍ، سَيَتَحَسَّنُ تَرْكِيزُكَ.</a:t>
@@ -8194,6 +8254,7 @@
                   <a:srgbClr val="8A6D1E"/>
                 </a:solidFill>
                 <a:latin typeface="Amiri" pitchFamily="2" charset="-78"/>
+                <a:ea typeface="Amiri" pitchFamily="2" charset="-78"/>
                 <a:cs typeface="Amiri" pitchFamily="2" charset="-78"/>
               </a:rPr>
               <a:t>يُقَوِّي الطَّعَامُ المُتَوَازِنُ جِهَازَ المَنَاعَةِ.</a:t>
@@ -8697,6 +8758,7 @@
                   <a:srgbClr val="8A6D1E"/>
                 </a:solidFill>
                 <a:latin typeface="Amiri" pitchFamily="2" charset="-78"/>
+                <a:ea typeface="Amiri" pitchFamily="2" charset="-78"/>
                 <a:cs typeface="Amiri" pitchFamily="2" charset="-78"/>
               </a:rPr>
               <a:t>يَبْقَى الطَّعَامُ الطَّازَجُ أَفْضَلَ مِنَ المُصَنَّعِ.</a:t>
@@ -8830,6 +8892,7 @@
                   <a:srgbClr val="D4AF37"/>
                 </a:solidFill>
                 <a:latin typeface="Amiri" pitchFamily="2" charset="-78"/>
+                <a:ea typeface="Amiri" pitchFamily="2" charset="-78"/>
                 <a:cs typeface="Amiri" pitchFamily="2" charset="-78"/>
               </a:rPr>
               <a:t>م</a:t>
@@ -9150,6 +9213,7 @@
                   <a:srgbClr val="8A6D1E"/>
                 </a:solidFill>
                 <a:latin typeface="Amiri" pitchFamily="2" charset="-78"/>
+                <a:ea typeface="Amiri" pitchFamily="2" charset="-78"/>
                 <a:cs typeface="Amiri" pitchFamily="2" charset="-78"/>
               </a:rPr>
               <a:t>الاِسْتِمَاعُ</a:t>
@@ -11949,6 +12013,7 @@
                   <a:srgbClr val="D4AF37"/>
                 </a:solidFill>
                 <a:latin typeface="Amiri" pitchFamily="2" charset="-78"/>
+                <a:ea typeface="Amiri" pitchFamily="2" charset="-78"/>
                 <a:cs typeface="Amiri" pitchFamily="2" charset="-78"/>
               </a:rPr>
               <a:t>م</a:t>
@@ -12269,6 +12334,7 @@
                   <a:srgbClr val="8A6D1E"/>
                 </a:solidFill>
                 <a:latin typeface="Amiri" pitchFamily="2" charset="-78"/>
+                <a:ea typeface="Amiri" pitchFamily="2" charset="-78"/>
                 <a:cs typeface="Amiri" pitchFamily="2" charset="-78"/>
               </a:rPr>
               <a:t>الإِجَابَاتُ</a:t>
@@ -12810,6 +12876,7 @@
                   <a:srgbClr val="8A6D1E"/>
                 </a:solidFill>
                 <a:latin typeface="Amiri" pitchFamily="2" charset="-78"/>
+                <a:ea typeface="Amiri" pitchFamily="2" charset="-78"/>
                 <a:cs typeface="Amiri" pitchFamily="2" charset="-78"/>
               </a:rPr>
               <a:t>سَامِي: أُعَانِي مِنَ التَّوَتُّرِ قَبْلَ الامْتِحَانَاتِ.</a:t>
@@ -13313,6 +13380,7 @@
                   <a:srgbClr val="8A6D1E"/>
                 </a:solidFill>
                 <a:latin typeface="Amiri" pitchFamily="2" charset="-78"/>
+                <a:ea typeface="Amiri" pitchFamily="2" charset="-78"/>
                 <a:cs typeface="Amiri" pitchFamily="2" charset="-78"/>
               </a:rPr>
               <a:t>لَيْلَى: أَتَغَلَّبُ عَلَى الضَّغْطِ بِالرِّيَاضَةِ وَالتَّنْظِيمِ.</a:t>
@@ -13816,6 +13884,7 @@
                   <a:srgbClr val="8A6D1E"/>
                 </a:solidFill>
                 <a:latin typeface="Amiri" pitchFamily="2" charset="-78"/>
+                <a:ea typeface="Amiri" pitchFamily="2" charset="-78"/>
                 <a:cs typeface="Amiri" pitchFamily="2" charset="-78"/>
               </a:rPr>
               <a:t>لَيْلَى تُمَارِسُ الرِّيَاضَةَ وَسَامِي يَقُولُ إِنَّهَا تُحَسِّنُ مِزَاجَهُ أَيْضًا.</a:t>
@@ -14319,6 +14388,7 @@
                   <a:srgbClr val="8A6D1E"/>
                 </a:solidFill>
                 <a:latin typeface="Amiri" pitchFamily="2" charset="-78"/>
+                <a:ea typeface="Amiri" pitchFamily="2" charset="-78"/>
                 <a:cs typeface="Amiri" pitchFamily="2" charset="-78"/>
               </a:rPr>
               <a:t>لَيْلَى: لَا أُحِبُّ السَّهَرَ عَلَى الشَّاشَاتِ.</a:t>
@@ -14822,6 +14892,7 @@
                   <a:srgbClr val="8A6D1E"/>
                 </a:solidFill>
                 <a:latin typeface="Amiri" pitchFamily="2" charset="-78"/>
+                <a:ea typeface="Amiri" pitchFamily="2" charset="-78"/>
                 <a:cs typeface="Amiri" pitchFamily="2" charset="-78"/>
               </a:rPr>
               <a:t>سَامِي: نَحْنُ الِاثْنَانِ نَحْتَاجُ إِلَى تَوَازُنٍ أَفْضَلَ.</a:t>
@@ -15325,6 +15396,7 @@
                   <a:srgbClr val="8A6D1E"/>
                 </a:solidFill>
                 <a:latin typeface="Amiri" pitchFamily="2" charset="-78"/>
+                <a:ea typeface="Amiri" pitchFamily="2" charset="-78"/>
                 <a:cs typeface="Amiri" pitchFamily="2" charset="-78"/>
               </a:rPr>
               <a:t>لَيْلَى: إِذَا نَظَّمْنَا وَقْتَنَا، سَنَشْعُرُ بِتَحَسُّنٍ.</a:t>
@@ -15458,6 +15530,7 @@
                   <a:srgbClr val="D4AF37"/>
                 </a:solidFill>
                 <a:latin typeface="Amiri" pitchFamily="2" charset="-78"/>
+                <a:ea typeface="Amiri" pitchFamily="2" charset="-78"/>
                 <a:cs typeface="Amiri" pitchFamily="2" charset="-78"/>
               </a:rPr>
               <a:t>م</a:t>
@@ -15778,6 +15851,7 @@
                   <a:srgbClr val="8A6D1E"/>
                 </a:solidFill>
                 <a:latin typeface="Amiri" pitchFamily="2" charset="-78"/>
+                <a:ea typeface="Amiri" pitchFamily="2" charset="-78"/>
                 <a:cs typeface="Amiri" pitchFamily="2" charset="-78"/>
               </a:rPr>
               <a:t>الاِسْتِمَاعُ</a:t>
@@ -18577,6 +18651,7 @@
                   <a:srgbClr val="D4AF37"/>
                 </a:solidFill>
                 <a:latin typeface="Amiri" pitchFamily="2" charset="-78"/>
+                <a:ea typeface="Amiri" pitchFamily="2" charset="-78"/>
                 <a:cs typeface="Amiri" pitchFamily="2" charset="-78"/>
               </a:rPr>
               <a:t>م</a:t>
@@ -18897,6 +18972,7 @@
                   <a:srgbClr val="8A6D1E"/>
                 </a:solidFill>
                 <a:latin typeface="Amiri" pitchFamily="2" charset="-78"/>
+                <a:ea typeface="Amiri" pitchFamily="2" charset="-78"/>
                 <a:cs typeface="Amiri" pitchFamily="2" charset="-78"/>
               </a:rPr>
               <a:t>الإِجَابَاتُ</a:t>
@@ -19438,6 +19514,7 @@
                   <a:srgbClr val="8A6D1E"/>
                 </a:solidFill>
                 <a:latin typeface="Amiri" pitchFamily="2" charset="-78"/>
+                <a:ea typeface="Amiri" pitchFamily="2" charset="-78"/>
                 <a:cs typeface="Amiri" pitchFamily="2" charset="-78"/>
               </a:rPr>
               <a:t>يُلْحِقُ التَّدْخِينُ ضَرَرًا بَالِغًا بِالرِّئَتَيْنِ.</a:t>
@@ -19941,6 +20018,7 @@
                   <a:srgbClr val="8A6D1E"/>
                 </a:solidFill>
                 <a:latin typeface="Amiri" pitchFamily="2" charset="-78"/>
+                <a:ea typeface="Amiri" pitchFamily="2" charset="-78"/>
                 <a:cs typeface="Amiri" pitchFamily="2" charset="-78"/>
               </a:rPr>
               <a:t>يُشَخَّصُ كَثِيرٌ مِنَ الحَالَاتِ مُتَأَخِّرًا.</a:t>
@@ -20444,6 +20522,7 @@
                   <a:srgbClr val="8A6D1E"/>
                 </a:solidFill>
                 <a:latin typeface="Amiri" pitchFamily="2" charset="-78"/>
+                <a:ea typeface="Amiri" pitchFamily="2" charset="-78"/>
                 <a:cs typeface="Amiri" pitchFamily="2" charset="-78"/>
               </a:rPr>
               <a:t>إِذَا أَقْلَعَ الشَّخْصُ … تَتَحَسَّنُ وَظَائِفُ الرِّئَةِ تَدْرِيجِيًّا.</a:t>
@@ -20947,6 +21026,7 @@
                   <a:srgbClr val="8A6D1E"/>
                 </a:solidFill>
                 <a:latin typeface="Amiri" pitchFamily="2" charset="-78"/>
+                <a:ea typeface="Amiri" pitchFamily="2" charset="-78"/>
                 <a:cs typeface="Amiri" pitchFamily="2" charset="-78"/>
               </a:rPr>
               <a:t>إِدْمَانُ الشَّاشَاتِ فَيُعِيقُ النَّوْمَ.</a:t>
@@ -21450,6 +21530,7 @@
                   <a:srgbClr val="8A6D1E"/>
                 </a:solidFill>
                 <a:latin typeface="Amiri" pitchFamily="2" charset="-78"/>
+                <a:ea typeface="Amiri" pitchFamily="2" charset="-78"/>
                 <a:cs typeface="Amiri" pitchFamily="2" charset="-78"/>
               </a:rPr>
               <a:t>يُنْصَحُ بِفَتْرَةٍ بِلَا شَاشَاتٍ قَبْلَ النَّوْمِ.</a:t>
@@ -21953,6 +22034,7 @@
                   <a:srgbClr val="8A6D1E"/>
                 </a:solidFill>
                 <a:latin typeface="Amiri" pitchFamily="2" charset="-78"/>
+                <a:ea typeface="Amiri" pitchFamily="2" charset="-78"/>
                 <a:cs typeface="Amiri" pitchFamily="2" charset="-78"/>
               </a:rPr>
               <a:t>لَيْسَ الهَدَفُ إِخَافَةَ النَّاسِ، بَلْ تَمْكِينَهُمْ مِنْ قَرَارٍ أَفْضَلَ.</a:t>
@@ -22086,6 +22168,7 @@
                   <a:srgbClr val="D4AF37"/>
                 </a:solidFill>
                 <a:latin typeface="Amiri" pitchFamily="2" charset="-78"/>
+                <a:ea typeface="Amiri" pitchFamily="2" charset="-78"/>
                 <a:cs typeface="Amiri" pitchFamily="2" charset="-78"/>
               </a:rPr>
               <a:t>م</a:t>
@@ -22406,6 +22489,7 @@
                   <a:srgbClr val="8A6D1E"/>
                 </a:solidFill>
                 <a:latin typeface="Amiri" pitchFamily="2" charset="-78"/>
+                <a:ea typeface="Amiri" pitchFamily="2" charset="-78"/>
                 <a:cs typeface="Amiri" pitchFamily="2" charset="-78"/>
               </a:rPr>
               <a:t>الشَّاشَاتُ وَالنَّوْمُ وَالتَّوَازُنُ</a:t>
@@ -22519,6 +22603,7 @@
                   <a:srgbClr val="1F2A37"/>
                 </a:solidFill>
                 <a:latin typeface="Amiri" pitchFamily="2" charset="-78"/>
+                <a:ea typeface="Amiri" pitchFamily="2" charset="-78"/>
                 <a:cs typeface="Amiri" pitchFamily="2" charset="-78"/>
               </a:rPr>
               <a:t>تُشِيرُ الدِّرَاسَاتُ إِلَى أَنَّ اسْتِعْمَالَ الشَّاشَاتِ قَبْلَ النَّوْمِ يُؤَثِّرُ عَلَى جَوْدَةِ النَّوْمِ، لِأَنَّ الضَّوْءَ الأَزْرَقَ يُؤَخِّرُ النَّوْمَ. وَإِذَا اسْتَعْمَلْتَ الهَاتِفَ فِي السَّرِيرِ، سَتَقِلُّ سَاعَاتُ نَوْمِكَ وَسَتَشْعُرُ بِالتَّعَبِ. أَمَّا إِذَا خَصَّصْتَ فَتْرَةَ هُدُوءٍ بِلَا شَاشَاتٍ، فَسَتَنَامُ أَعْمَقَ. وَيُنْصَحُ بِإِطْفَاءِ الإِشْعَارَاتِ لَيْلًا. وَيَرْتَبِطُ الأَرَقُ بِالتَّعَبِ المُزْمِنِ وَضَعْفِ التَّرْكِيزِ. وَلَيْسَتِ التِّقْنِيَّةُ عَدُوًّا؛ فَالمُهِمُّ هُوَ التَّوَازُنُ الرَّقْمِيُّ. وَفِي رَأْيِي، النَّوْمُ الجَيِّدُ لَا يَقِلُّ أَهَمِّيَّةً عَنِ الغِذَاءِ وَالحَرَكَةِ.</a:t>
@@ -22652,6 +22737,7 @@
                   <a:srgbClr val="D4AF37"/>
                 </a:solidFill>
                 <a:latin typeface="Amiri" pitchFamily="2" charset="-78"/>
+                <a:ea typeface="Amiri" pitchFamily="2" charset="-78"/>
                 <a:cs typeface="Amiri" pitchFamily="2" charset="-78"/>
               </a:rPr>
               <a:t>م</a:t>
@@ -22972,6 +23058,7 @@
                   <a:srgbClr val="8A6D1E"/>
                 </a:solidFill>
                 <a:latin typeface="Amiri" pitchFamily="2" charset="-78"/>
+                <a:ea typeface="Amiri" pitchFamily="2" charset="-78"/>
                 <a:cs typeface="Amiri" pitchFamily="2" charset="-78"/>
               </a:rPr>
               <a:t>أَسْئِلَةُ القِرَاءَةِ</a:t>
@@ -24998,6 +25085,7 @@
                   <a:srgbClr val="1F2A37"/>
                 </a:solidFill>
                 <a:latin typeface="Amiri" pitchFamily="2" charset="-78"/>
+                <a:ea typeface="Amiri" pitchFamily="2" charset="-78"/>
                 <a:cs typeface="Amiri" pitchFamily="2" charset="-78"/>
               </a:rPr>
               <a:t>يُنْصَحُ بِإِطْفَاءِ الإِشْعَارَاتِ</a:t>
@@ -25099,6 +25187,7 @@
                   <a:srgbClr val="1F2A37"/>
                 </a:solidFill>
                 <a:latin typeface="Amiri" pitchFamily="2" charset="-78"/>
+                <a:ea typeface="Amiri" pitchFamily="2" charset="-78"/>
                 <a:cs typeface="Amiri" pitchFamily="2" charset="-78"/>
               </a:rPr>
               <a:t>الضَّوْءُ الأَزْرَقُ يُؤَخِّرُ النَّوْمَ</a:t>
@@ -25200,6 +25289,7 @@
                   <a:srgbClr val="1F2A37"/>
                 </a:solidFill>
                 <a:latin typeface="Amiri" pitchFamily="2" charset="-78"/>
+                <a:ea typeface="Amiri" pitchFamily="2" charset="-78"/>
                 <a:cs typeface="Amiri" pitchFamily="2" charset="-78"/>
               </a:rPr>
               <a:t>إِذَا اسْتَعْمَلْتَ الهَاتِفَ فِي السَّرِيرِ، سَتَقِلُّ سَاعَاتُ نَوْمِكَ</a:t>
@@ -25333,6 +25423,7 @@
                   <a:srgbClr val="D4AF37"/>
                 </a:solidFill>
                 <a:latin typeface="Amiri" pitchFamily="2" charset="-78"/>
+                <a:ea typeface="Amiri" pitchFamily="2" charset="-78"/>
                 <a:cs typeface="Amiri" pitchFamily="2" charset="-78"/>
               </a:rPr>
               <a:t>م</a:t>
@@ -25653,6 +25744,7 @@
                   <a:srgbClr val="8A6D1E"/>
                 </a:solidFill>
                 <a:latin typeface="Amiri" pitchFamily="2" charset="-78"/>
+                <a:ea typeface="Amiri" pitchFamily="2" charset="-78"/>
                 <a:cs typeface="Amiri" pitchFamily="2" charset="-78"/>
               </a:rPr>
               <a:t>الإِجَابَاتُ</a:t>
@@ -26697,6 +26789,7 @@
                   <a:srgbClr val="8A6D1E"/>
                 </a:solidFill>
                 <a:latin typeface="Amiri" pitchFamily="2" charset="-78"/>
+                <a:ea typeface="Amiri" pitchFamily="2" charset="-78"/>
                 <a:cs typeface="Amiri" pitchFamily="2" charset="-78"/>
               </a:rPr>
               <a:t>لِأَنَّ الضَّوْءَ الأَزْرَقَ يُؤَخِّرُ النَّوْمَ.</a:t>
@@ -27200,6 +27293,7 @@
                   <a:srgbClr val="8A6D1E"/>
                 </a:solidFill>
                 <a:latin typeface="Amiri" pitchFamily="2" charset="-78"/>
+                <a:ea typeface="Amiri" pitchFamily="2" charset="-78"/>
                 <a:cs typeface="Amiri" pitchFamily="2" charset="-78"/>
               </a:rPr>
               <a:t>سَتَقِلُّ سَاعَاتُ نَوْمِكَ وَسَتَشْعُرُ بِالتَّعَبِ.</a:t>
@@ -27703,6 +27797,7 @@
                   <a:srgbClr val="8A6D1E"/>
                 </a:solidFill>
                 <a:latin typeface="Amiri" pitchFamily="2" charset="-78"/>
+                <a:ea typeface="Amiri" pitchFamily="2" charset="-78"/>
                 <a:cs typeface="Amiri" pitchFamily="2" charset="-78"/>
               </a:rPr>
               <a:t>يَرْتَبِطُ الأَرَقُ بِالتَّعَبِ المُزْمِنِ وَضَعْفِ التَّرْكِيزِ.</a:t>
@@ -27939,6 +28034,7 @@
                   <a:srgbClr val="9AA1AB"/>
                 </a:solidFill>
                 <a:latin typeface="Amiri" pitchFamily="2" charset="-78"/>
+                <a:ea typeface="Amiri" pitchFamily="2" charset="-78"/>
                 <a:cs typeface="Amiri" pitchFamily="2" charset="-78"/>
               </a:rPr>
               <a:t>يُنْصَحُ بِإِطْفَاءِ الإِشْعَارَاتِ</a:t>
@@ -28040,6 +28136,7 @@
                   <a:srgbClr val="9AA1AB"/>
                 </a:solidFill>
                 <a:latin typeface="Amiri" pitchFamily="2" charset="-78"/>
+                <a:ea typeface="Amiri" pitchFamily="2" charset="-78"/>
                 <a:cs typeface="Amiri" pitchFamily="2" charset="-78"/>
               </a:rPr>
               <a:t>الضَّوْءُ الأَزْرَقُ يُؤَخِّرُ النَّوْمَ</a:t>
@@ -28168,6 +28265,7 @@
                   <a:srgbClr val="1F2A37"/>
                 </a:solidFill>
                 <a:latin typeface="Amiri" pitchFamily="2" charset="-78"/>
+                <a:ea typeface="Amiri" pitchFamily="2" charset="-78"/>
                 <a:cs typeface="Amiri" pitchFamily="2" charset="-78"/>
               </a:rPr>
               <a:t>إِذَا اسْتَعْمَلْتَ الهَاتِفَ فِي السَّرِيرِ، سَتَقِلُّ سَاعَاتُ نَوْمِكَ</a:t>
@@ -28206,6 +28304,7 @@
                   <a:srgbClr val="8A6D1E"/>
                 </a:solidFill>
                 <a:latin typeface="Amiri" pitchFamily="2" charset="-78"/>
+                <a:ea typeface="Amiri" pitchFamily="2" charset="-78"/>
                 <a:cs typeface="Amiri" pitchFamily="2" charset="-78"/>
               </a:rPr>
               <a:t>إِذَا … سَـ</a:t>
@@ -28352,6 +28451,7 @@
                   <a:srgbClr val="D4AF37"/>
                 </a:solidFill>
                 <a:latin typeface="Amiri" pitchFamily="2" charset="-78"/>
+                <a:ea typeface="Amiri" pitchFamily="2" charset="-78"/>
                 <a:cs typeface="Amiri" pitchFamily="2" charset="-78"/>
               </a:rPr>
               <a:t>م</a:t>
@@ -28672,6 +28772,7 @@
                   <a:srgbClr val="8A6D1E"/>
                 </a:solidFill>
                 <a:latin typeface="Amiri" pitchFamily="2" charset="-78"/>
+                <a:ea typeface="Amiri" pitchFamily="2" charset="-78"/>
                 <a:cs typeface="Amiri" pitchFamily="2" charset="-78"/>
               </a:rPr>
               <a:t>أَسْئِلَةُ القِرَاءَةِ</a:t>
@@ -29384,6 +29485,7 @@
                   <a:srgbClr val="1F2A37"/>
                 </a:solidFill>
                 <a:latin typeface="Amiri" pitchFamily="2" charset="-78"/>
+                <a:ea typeface="Amiri" pitchFamily="2" charset="-78"/>
                 <a:cs typeface="Amiri" pitchFamily="2" charset="-78"/>
               </a:rPr>
               <a:t>سَتَنَامُ أَعْمَقَ</a:t>
@@ -29485,6 +29587,7 @@
                   <a:srgbClr val="1F2A37"/>
                 </a:solidFill>
                 <a:latin typeface="Amiri" pitchFamily="2" charset="-78"/>
+                <a:ea typeface="Amiri" pitchFamily="2" charset="-78"/>
                 <a:cs typeface="Amiri" pitchFamily="2" charset="-78"/>
               </a:rPr>
               <a:t>يُنْصَحُ بِإِطْفَاءِ الإِشْعَارَاتِ</a:t>
@@ -29586,6 +29689,7 @@
                   <a:srgbClr val="1F2A37"/>
                 </a:solidFill>
                 <a:latin typeface="Amiri" pitchFamily="2" charset="-78"/>
+                <a:ea typeface="Amiri" pitchFamily="2" charset="-78"/>
                 <a:cs typeface="Amiri" pitchFamily="2" charset="-78"/>
               </a:rPr>
               <a:t>النَّوْمُ الجَيِّدُ مُهِمٌّ</a:t>
@@ -30172,6 +30276,7 @@
                   <a:srgbClr val="1B3B6F"/>
                 </a:solidFill>
                 <a:latin typeface="Amiri" pitchFamily="2" charset="-78"/>
+                <a:ea typeface="Amiri" pitchFamily="2" charset="-78"/>
                 <a:cs typeface="Amiri" pitchFamily="2" charset="-78"/>
               </a:rPr>
               <a:t>أَمَّا إِذَا خَصَّصْتَ فَتْرَةَ هُدُوءٍ، فَـ</a:t>
@@ -30198,6 +30303,7 @@
                   <a:srgbClr val="1B3B6F"/>
                 </a:solidFill>
                 <a:latin typeface="Amiri" pitchFamily="2" charset="-78"/>
+                <a:ea typeface="Amiri" pitchFamily="2" charset="-78"/>
                 <a:cs typeface="Amiri" pitchFamily="2" charset="-78"/>
               </a:rPr>
               <a:t>أَعْمَقَ</a:t>
@@ -30312,6 +30418,7 @@
                   <a:srgbClr val="1F2A37"/>
                 </a:solidFill>
                 <a:latin typeface="Amiri" pitchFamily="2" charset="-78"/>
+                <a:ea typeface="Amiri" pitchFamily="2" charset="-78"/>
                 <a:cs typeface="Amiri" pitchFamily="2" charset="-78"/>
               </a:rPr>
               <a:t>نِمْتَ</a:t>
@@ -30413,6 +30520,7 @@
                   <a:srgbClr val="1F2A37"/>
                 </a:solidFill>
                 <a:latin typeface="Amiri" pitchFamily="2" charset="-78"/>
+                <a:ea typeface="Amiri" pitchFamily="2" charset="-78"/>
                 <a:cs typeface="Amiri" pitchFamily="2" charset="-78"/>
               </a:rPr>
               <a:t>تَنَامُ أَمْسِ</a:t>
@@ -30514,6 +30622,7 @@
                   <a:srgbClr val="1F2A37"/>
                 </a:solidFill>
                 <a:latin typeface="Amiri" pitchFamily="2" charset="-78"/>
+                <a:ea typeface="Amiri" pitchFamily="2" charset="-78"/>
                 <a:cs typeface="Amiri" pitchFamily="2" charset="-78"/>
               </a:rPr>
               <a:t>سَتَنَامُ</a:t>
@@ -30662,6 +30771,7 @@
                   <a:srgbClr val="1B3B6F"/>
                 </a:solidFill>
                 <a:latin typeface="Amiri" pitchFamily="2" charset="-78"/>
+                <a:ea typeface="Amiri" pitchFamily="2" charset="-78"/>
                 <a:cs typeface="Amiri" pitchFamily="2" charset="-78"/>
               </a:rPr>
               <a:t>وَإِذَا</a:t>
@@ -30688,6 +30798,7 @@
                   <a:srgbClr val="1B3B6F"/>
                 </a:solidFill>
                 <a:latin typeface="Amiri" pitchFamily="2" charset="-78"/>
+                <a:ea typeface="Amiri" pitchFamily="2" charset="-78"/>
                 <a:cs typeface="Amiri" pitchFamily="2" charset="-78"/>
               </a:rPr>
               <a:t>الهَاتِفَ فِي السَّرِيرِ، سَتَقِلُّ سَاعَاتُ نَوْمِكَ</a:t>
@@ -30802,6 +30913,7 @@
                   <a:srgbClr val="1F2A37"/>
                 </a:solidFill>
                 <a:latin typeface="Amiri" pitchFamily="2" charset="-78"/>
+                <a:ea typeface="Amiri" pitchFamily="2" charset="-78"/>
                 <a:cs typeface="Amiri" pitchFamily="2" charset="-78"/>
               </a:rPr>
               <a:t>تَسْتَعْمِلُ</a:t>
@@ -30903,6 +31015,7 @@
                   <a:srgbClr val="1F2A37"/>
                 </a:solidFill>
                 <a:latin typeface="Amiri" pitchFamily="2" charset="-78"/>
+                <a:ea typeface="Amiri" pitchFamily="2" charset="-78"/>
                 <a:cs typeface="Amiri" pitchFamily="2" charset="-78"/>
               </a:rPr>
               <a:t>اسْتَعْمَلْتَ</a:t>
@@ -31004,6 +31117,7 @@
                   <a:srgbClr val="1F2A37"/>
                 </a:solidFill>
                 <a:latin typeface="Amiri" pitchFamily="2" charset="-78"/>
+                <a:ea typeface="Amiri" pitchFamily="2" charset="-78"/>
                 <a:cs typeface="Amiri" pitchFamily="2" charset="-78"/>
               </a:rPr>
               <a:t>سَتَسْتَعْمِلُ</a:t>
@@ -31137,6 +31251,7 @@
                   <a:srgbClr val="D4AF37"/>
                 </a:solidFill>
                 <a:latin typeface="Amiri" pitchFamily="2" charset="-78"/>
+                <a:ea typeface="Amiri" pitchFamily="2" charset="-78"/>
                 <a:cs typeface="Amiri" pitchFamily="2" charset="-78"/>
               </a:rPr>
               <a:t>م</a:t>
@@ -31457,6 +31572,7 @@
                   <a:srgbClr val="8A6D1E"/>
                 </a:solidFill>
                 <a:latin typeface="Amiri" pitchFamily="2" charset="-78"/>
+                <a:ea typeface="Amiri" pitchFamily="2" charset="-78"/>
                 <a:cs typeface="Amiri" pitchFamily="2" charset="-78"/>
               </a:rPr>
               <a:t>آدَابُ الصَّفِّ</a:t>
@@ -32988,6 +33104,7 @@
                   <a:srgbClr val="D4AF37"/>
                 </a:solidFill>
                 <a:latin typeface="Amiri" pitchFamily="2" charset="-78"/>
+                <a:ea typeface="Amiri" pitchFamily="2" charset="-78"/>
                 <a:cs typeface="Amiri" pitchFamily="2" charset="-78"/>
               </a:rPr>
               <a:t>م</a:t>
@@ -33308,6 +33425,7 @@
                   <a:srgbClr val="8A6D1E"/>
                 </a:solidFill>
                 <a:latin typeface="Amiri" pitchFamily="2" charset="-78"/>
+                <a:ea typeface="Amiri" pitchFamily="2" charset="-78"/>
                 <a:cs typeface="Amiri" pitchFamily="2" charset="-78"/>
               </a:rPr>
               <a:t>الإِجَابَاتُ</a:t>
@@ -34085,6 +34203,7 @@
                   <a:srgbClr val="9AA1AB"/>
                 </a:solidFill>
                 <a:latin typeface="Amiri" pitchFamily="2" charset="-78"/>
+                <a:ea typeface="Amiri" pitchFamily="2" charset="-78"/>
                 <a:cs typeface="Amiri" pitchFamily="2" charset="-78"/>
               </a:rPr>
               <a:t>سَتَنَامُ أَعْمَقَ</a:t>
@@ -34213,6 +34332,7 @@
                   <a:srgbClr val="1F2A37"/>
                 </a:solidFill>
                 <a:latin typeface="Amiri" pitchFamily="2" charset="-78"/>
+                <a:ea typeface="Amiri" pitchFamily="2" charset="-78"/>
                 <a:cs typeface="Amiri" pitchFamily="2" charset="-78"/>
               </a:rPr>
               <a:t>يُنْصَحُ بِإِطْفَاءِ الإِشْعَارَاتِ</a:t>
@@ -34314,6 +34434,7 @@
                   <a:srgbClr val="9AA1AB"/>
                 </a:solidFill>
                 <a:latin typeface="Amiri" pitchFamily="2" charset="-78"/>
+                <a:ea typeface="Amiri" pitchFamily="2" charset="-78"/>
                 <a:cs typeface="Amiri" pitchFamily="2" charset="-78"/>
               </a:rPr>
               <a:t>النَّوْمُ الجَيِّدُ مُهِمٌّ</a:t>
@@ -34352,6 +34473,7 @@
                   <a:srgbClr val="8A6D1E"/>
                 </a:solidFill>
                 <a:latin typeface="Amiri" pitchFamily="2" charset="-78"/>
+                <a:ea typeface="Amiri" pitchFamily="2" charset="-78"/>
                 <a:cs typeface="Amiri" pitchFamily="2" charset="-78"/>
               </a:rPr>
               <a:t>يُنْصَحُ</a:t>
@@ -34868,6 +34990,7 @@
                   <a:srgbClr val="8A6D1E"/>
                 </a:solidFill>
                 <a:latin typeface="Amiri" pitchFamily="2" charset="-78"/>
+                <a:ea typeface="Amiri" pitchFamily="2" charset="-78"/>
                 <a:cs typeface="Amiri" pitchFamily="2" charset="-78"/>
               </a:rPr>
               <a:t>لَيْسَتِ التِّقْنِيَّةُ عَدُوًّا؛ فَالمُهِمُّ هُوَ التَّوَازُنُ.</a:t>
@@ -35016,6 +35139,7 @@
                   <a:srgbClr val="1B3B6F"/>
                 </a:solidFill>
                 <a:latin typeface="Amiri" pitchFamily="2" charset="-78"/>
+                <a:ea typeface="Amiri" pitchFamily="2" charset="-78"/>
                 <a:cs typeface="Amiri" pitchFamily="2" charset="-78"/>
               </a:rPr>
               <a:t>أَمَّا إِذَا خَصَّصْتَ فَتْرَةَ هُدُوءٍ، فَـ</a:t>
@@ -35042,6 +35166,7 @@
                   <a:srgbClr val="1B3B6F"/>
                 </a:solidFill>
                 <a:latin typeface="Amiri" pitchFamily="2" charset="-78"/>
+                <a:ea typeface="Amiri" pitchFamily="2" charset="-78"/>
                 <a:cs typeface="Amiri" pitchFamily="2" charset="-78"/>
               </a:rPr>
               <a:t>أَعْمَقَ</a:t>
@@ -35156,6 +35281,7 @@
                   <a:srgbClr val="9AA1AB"/>
                 </a:solidFill>
                 <a:latin typeface="Amiri" pitchFamily="2" charset="-78"/>
+                <a:ea typeface="Amiri" pitchFamily="2" charset="-78"/>
                 <a:cs typeface="Amiri" pitchFamily="2" charset="-78"/>
               </a:rPr>
               <a:t>نِمْتَ</a:t>
@@ -35257,6 +35383,7 @@
                   <a:srgbClr val="9AA1AB"/>
                 </a:solidFill>
                 <a:latin typeface="Amiri" pitchFamily="2" charset="-78"/>
+                <a:ea typeface="Amiri" pitchFamily="2" charset="-78"/>
                 <a:cs typeface="Amiri" pitchFamily="2" charset="-78"/>
               </a:rPr>
               <a:t>تَنَامُ أَمْسِ</a:t>
@@ -35385,6 +35512,7 @@
                   <a:srgbClr val="1F2A37"/>
                 </a:solidFill>
                 <a:latin typeface="Amiri" pitchFamily="2" charset="-78"/>
+                <a:ea typeface="Amiri" pitchFamily="2" charset="-78"/>
                 <a:cs typeface="Amiri" pitchFamily="2" charset="-78"/>
               </a:rPr>
               <a:t>سَتَنَامُ</a:t>
@@ -35436,6 +35564,7 @@
                   <a:srgbClr val="8A6D1E"/>
                 </a:solidFill>
                 <a:latin typeface="Amiri" pitchFamily="2" charset="-78"/>
+                <a:ea typeface="Amiri" pitchFamily="2" charset="-78"/>
                 <a:cs typeface="Amiri" pitchFamily="2" charset="-78"/>
               </a:rPr>
               <a:t>سَـ</a:t>
@@ -35597,6 +35726,7 @@
                   <a:srgbClr val="1B3B6F"/>
                 </a:solidFill>
                 <a:latin typeface="Amiri" pitchFamily="2" charset="-78"/>
+                <a:ea typeface="Amiri" pitchFamily="2" charset="-78"/>
                 <a:cs typeface="Amiri" pitchFamily="2" charset="-78"/>
               </a:rPr>
               <a:t>وَإِذَا</a:t>
@@ -35623,6 +35753,7 @@
                   <a:srgbClr val="1B3B6F"/>
                 </a:solidFill>
                 <a:latin typeface="Amiri" pitchFamily="2" charset="-78"/>
+                <a:ea typeface="Amiri" pitchFamily="2" charset="-78"/>
                 <a:cs typeface="Amiri" pitchFamily="2" charset="-78"/>
               </a:rPr>
               <a:t>الهَاتِفَ فِي السَّرِيرِ، سَتَقِلُّ سَاعَاتُ نَوْمِكَ</a:t>
@@ -35737,6 +35868,7 @@
                   <a:srgbClr val="9AA1AB"/>
                 </a:solidFill>
                 <a:latin typeface="Amiri" pitchFamily="2" charset="-78"/>
+                <a:ea typeface="Amiri" pitchFamily="2" charset="-78"/>
                 <a:cs typeface="Amiri" pitchFamily="2" charset="-78"/>
               </a:rPr>
               <a:t>تَسْتَعْمِلُ</a:t>
@@ -35865,6 +35997,7 @@
                   <a:srgbClr val="1F2A37"/>
                 </a:solidFill>
                 <a:latin typeface="Amiri" pitchFamily="2" charset="-78"/>
+                <a:ea typeface="Amiri" pitchFamily="2" charset="-78"/>
                 <a:cs typeface="Amiri" pitchFamily="2" charset="-78"/>
               </a:rPr>
               <a:t>اسْتَعْمَلْتَ</a:t>
@@ -35966,6 +36099,7 @@
                   <a:srgbClr val="9AA1AB"/>
                 </a:solidFill>
                 <a:latin typeface="Amiri" pitchFamily="2" charset="-78"/>
+                <a:ea typeface="Amiri" pitchFamily="2" charset="-78"/>
                 <a:cs typeface="Amiri" pitchFamily="2" charset="-78"/>
               </a:rPr>
               <a:t>سَتَسْتَعْمِلُ</a:t>
@@ -36004,6 +36138,7 @@
                   <a:srgbClr val="8A6D1E"/>
                 </a:solidFill>
                 <a:latin typeface="Amiri" pitchFamily="2" charset="-78"/>
+                <a:ea typeface="Amiri" pitchFamily="2" charset="-78"/>
                 <a:cs typeface="Amiri" pitchFamily="2" charset="-78"/>
               </a:rPr>
               <a:t>إِذَا</a:t>
@@ -36150,6 +36285,7 @@
                   <a:srgbClr val="D4AF37"/>
                 </a:solidFill>
                 <a:latin typeface="Amiri" pitchFamily="2" charset="-78"/>
+                <a:ea typeface="Amiri" pitchFamily="2" charset="-78"/>
                 <a:cs typeface="Amiri" pitchFamily="2" charset="-78"/>
               </a:rPr>
               <a:t>م</a:t>
@@ -36470,6 +36606,7 @@
                   <a:srgbClr val="8A6D1E"/>
                 </a:solidFill>
                 <a:latin typeface="Amiri" pitchFamily="2" charset="-78"/>
+                <a:ea typeface="Amiri" pitchFamily="2" charset="-78"/>
                 <a:cs typeface="Amiri" pitchFamily="2" charset="-78"/>
               </a:rPr>
               <a:t>المِلَفُّ الصِّحِّيُّ</a:t>
@@ -36750,6 +36887,7 @@
                   <a:srgbClr val="1B3B6F"/>
                 </a:solidFill>
                 <a:latin typeface="Amiri" pitchFamily="2" charset="-78"/>
+                <a:ea typeface="Amiri" pitchFamily="2" charset="-78"/>
                 <a:cs typeface="Amiri" pitchFamily="2" charset="-78"/>
               </a:rPr>
               <a:t>نَوْعُ نِظَامِكَ الغِذَائِيِّ الرَّئِيسِيُّ</a:t>
@@ -36956,6 +37094,7 @@
                   <a:srgbClr val="1B3B6F"/>
                 </a:solidFill>
                 <a:latin typeface="Amiri" pitchFamily="2" charset="-78"/>
+                <a:ea typeface="Amiri" pitchFamily="2" charset="-78"/>
                 <a:cs typeface="Amiri" pitchFamily="2" charset="-78"/>
               </a:rPr>
               <a:t>عَدَدُ مَرَّاتِ الرِّيَاضَةِ أُسْبُوعِيًّا</a:t>
@@ -37162,6 +37301,7 @@
                   <a:srgbClr val="1B3B6F"/>
                 </a:solidFill>
                 <a:latin typeface="Amiri" pitchFamily="2" charset="-78"/>
+                <a:ea typeface="Amiri" pitchFamily="2" charset="-78"/>
                 <a:cs typeface="Amiri" pitchFamily="2" charset="-78"/>
               </a:rPr>
               <a:t>سَاعَاتُ نَوْمِكَ فِي اللَّيْلَةِ</a:t>
@@ -37368,6 +37508,7 @@
                   <a:srgbClr val="1B3B6F"/>
                 </a:solidFill>
                 <a:latin typeface="Amiri" pitchFamily="2" charset="-78"/>
+                <a:ea typeface="Amiri" pitchFamily="2" charset="-78"/>
                 <a:cs typeface="Amiri" pitchFamily="2" charset="-78"/>
               </a:rPr>
               <a:t>تَحَدٍّ صِحِّيٌّ وَاحِدٌ تُوَاجِهُهُ</a:t>
@@ -37574,6 +37715,7 @@
                   <a:srgbClr val="1B3B6F"/>
                 </a:solidFill>
                 <a:latin typeface="Amiri" pitchFamily="2" charset="-78"/>
+                <a:ea typeface="Amiri" pitchFamily="2" charset="-78"/>
                 <a:cs typeface="Amiri" pitchFamily="2" charset="-78"/>
               </a:rPr>
               <a:t>تَوْصِيَةٌ شَرْطِيَّةٌ لِحَيَاةٍ أَصَحَّ</a:t>
@@ -37728,6 +37870,7 @@
                   <a:srgbClr val="1B3B6F"/>
                 </a:solidFill>
                 <a:latin typeface="Amiri" pitchFamily="2" charset="-78"/>
+                <a:ea typeface="Amiri" pitchFamily="2" charset="-78"/>
                 <a:cs typeface="Amiri" pitchFamily="2" charset="-78"/>
               </a:rPr>
               <a:t>نِظَامٌ غَنِيٌّ بِالخُضَارِ</a:t>
@@ -37754,6 +37897,7 @@
                   <a:srgbClr val="1B3B6F"/>
                 </a:solidFill>
                 <a:latin typeface="Amiri" pitchFamily="2" charset="-78"/>
+                <a:ea typeface="Amiri" pitchFamily="2" charset="-78"/>
                 <a:cs typeface="Amiri" pitchFamily="2" charset="-78"/>
               </a:rPr>
               <a:t>ثَلَاثَ مَرَّاتٍ</a:t>
@@ -37780,6 +37924,7 @@
                   <a:srgbClr val="1B3B6F"/>
                 </a:solidFill>
                 <a:latin typeface="Amiri" pitchFamily="2" charset="-78"/>
+                <a:ea typeface="Amiri" pitchFamily="2" charset="-78"/>
                 <a:cs typeface="Amiri" pitchFamily="2" charset="-78"/>
               </a:rPr>
               <a:t>سَبْعُ سَاعَاتٍ</a:t>
@@ -37806,6 +37951,7 @@
                   <a:srgbClr val="1B3B6F"/>
                 </a:solidFill>
                 <a:latin typeface="Amiri" pitchFamily="2" charset="-78"/>
+                <a:ea typeface="Amiri" pitchFamily="2" charset="-78"/>
                 <a:cs typeface="Amiri" pitchFamily="2" charset="-78"/>
               </a:rPr>
               <a:t>أُعَانِي مِنَ السَّهَرِ</a:t>
@@ -37832,6 +37978,7 @@
                   <a:srgbClr val="1B3B6F"/>
                 </a:solidFill>
                 <a:latin typeface="Amiri" pitchFamily="2" charset="-78"/>
+                <a:ea typeface="Amiri" pitchFamily="2" charset="-78"/>
                 <a:cs typeface="Amiri" pitchFamily="2" charset="-78"/>
               </a:rPr>
               <a:t>إِذَا نِمْتُ مُبَكِّرًا، سَيَتَحَسَّنُ تَرْكِيزِي</a:t>
@@ -37965,6 +38112,7 @@
                   <a:srgbClr val="D4AF37"/>
                 </a:solidFill>
                 <a:latin typeface="Amiri" pitchFamily="2" charset="-78"/>
+                <a:ea typeface="Amiri" pitchFamily="2" charset="-78"/>
                 <a:cs typeface="Amiri" pitchFamily="2" charset="-78"/>
               </a:rPr>
               <a:t>م</a:t>
@@ -38285,6 +38433,7 @@
                   <a:srgbClr val="8A6D1E"/>
                 </a:solidFill>
                 <a:latin typeface="Amiri" pitchFamily="2" charset="-78"/>
+                <a:ea typeface="Amiri" pitchFamily="2" charset="-78"/>
                 <a:cs typeface="Amiri" pitchFamily="2" charset="-78"/>
               </a:rPr>
               <a:t>أَسَالِيبُ الحَيَاةِ الصِّحِّيَّةِ</a:t>
@@ -39099,6 +39248,7 @@
                   <a:srgbClr val="D4AF37"/>
                 </a:solidFill>
                 <a:latin typeface="Amiri" pitchFamily="2" charset="-78"/>
+                <a:ea typeface="Amiri" pitchFamily="2" charset="-78"/>
                 <a:cs typeface="Amiri" pitchFamily="2" charset="-78"/>
               </a:rPr>
               <a:t>م</a:t>
@@ -39419,6 +39569,7 @@
                   <a:srgbClr val="8A6D1E"/>
                 </a:solidFill>
                 <a:latin typeface="Amiri" pitchFamily="2" charset="-78"/>
+                <a:ea typeface="Amiri" pitchFamily="2" charset="-78"/>
                 <a:cs typeface="Amiri" pitchFamily="2" charset="-78"/>
               </a:rPr>
               <a:t>اسْتِشَارَةٌ صِحِّيَّةٌ</a:t>
@@ -39661,6 +39812,7 @@
                   <a:srgbClr val="1B3B6F"/>
                 </a:solidFill>
                 <a:latin typeface="Amiri" pitchFamily="2" charset="-78"/>
+                <a:ea typeface="Amiri" pitchFamily="2" charset="-78"/>
                 <a:cs typeface="Amiri" pitchFamily="2" charset="-78"/>
               </a:rPr>
               <a:t>صِفْ نِظَامَكَ الغِذَائِيَّ (غَنِيٌّ بِـ / يَحْتَوِي عَلَى).</a:t>
@@ -39829,6 +39981,7 @@
                   <a:srgbClr val="1B3B6F"/>
                 </a:solidFill>
                 <a:latin typeface="Amiri" pitchFamily="2" charset="-78"/>
+                <a:ea typeface="Amiri" pitchFamily="2" charset="-78"/>
                 <a:cs typeface="Amiri" pitchFamily="2" charset="-78"/>
               </a:rPr>
               <a:t>صِفْ عَادَاتِكَ الرِّيَاضِيَّةَ.</a:t>
@@ -39997,6 +40150,7 @@
                   <a:srgbClr val="1B3B6F"/>
                 </a:solidFill>
                 <a:latin typeface="Amiri" pitchFamily="2" charset="-78"/>
+                <a:ea typeface="Amiri" pitchFamily="2" charset="-78"/>
                 <a:cs typeface="Amiri" pitchFamily="2" charset="-78"/>
               </a:rPr>
               <a:t>قُلْ مَا التَّحَدِّي الصِّحِّيُّ الَّذِي تُوَاجِهُهُ (يُعَانِي مِنْ).</a:t>
@@ -40165,6 +40319,7 @@
                   <a:srgbClr val="1B3B6F"/>
                 </a:solidFill>
                 <a:latin typeface="Amiri" pitchFamily="2" charset="-78"/>
+                <a:ea typeface="Amiri" pitchFamily="2" charset="-78"/>
                 <a:cs typeface="Amiri" pitchFamily="2" charset="-78"/>
               </a:rPr>
               <a:t>اطْلُبْ تَوْصِيَةً شَرْطِيَّةً: «إِذَا فَعَلْتُ كَذَا، سَـ…؟»</a:t>
@@ -40401,6 +40556,7 @@
                   <a:srgbClr val="D4AF37"/>
                 </a:solidFill>
                 <a:latin typeface="Amiri" pitchFamily="2" charset="-78"/>
+                <a:ea typeface="Amiri" pitchFamily="2" charset="-78"/>
                 <a:cs typeface="Amiri" pitchFamily="2" charset="-78"/>
               </a:rPr>
               <a:t>م</a:t>
@@ -40721,6 +40877,7 @@
                   <a:srgbClr val="8A6D1E"/>
                 </a:solidFill>
                 <a:latin typeface="Amiri" pitchFamily="2" charset="-78"/>
+                <a:ea typeface="Amiri" pitchFamily="2" charset="-78"/>
                 <a:cs typeface="Amiri" pitchFamily="2" charset="-78"/>
               </a:rPr>
               <a:t>المُحَادَثَةُ</a:t>
@@ -40963,6 +41120,7 @@
                   <a:srgbClr val="1B3B6F"/>
                 </a:solidFill>
                 <a:latin typeface="Amiri" pitchFamily="2" charset="-78"/>
+                <a:ea typeface="Amiri" pitchFamily="2" charset="-78"/>
                 <a:cs typeface="Amiri" pitchFamily="2" charset="-78"/>
               </a:rPr>
               <a:t>مَا نِظَامُكَ الغِذَائِيُّ؟ مَا الأَطْعِمَةُ الَّتِي تُوصِي بِهَا؟</a:t>
@@ -41131,6 +41289,7 @@
                   <a:srgbClr val="1B3B6F"/>
                 </a:solidFill>
                 <a:latin typeface="Amiri" pitchFamily="2" charset="-78"/>
+                <a:ea typeface="Amiri" pitchFamily="2" charset="-78"/>
                 <a:cs typeface="Amiri" pitchFamily="2" charset="-78"/>
               </a:rPr>
               <a:t>كَيْفَ تَتَعَامَلُ مَعَ الضَّغْطِ الدِّرَاسِيِّ؟</a:t>
@@ -41299,6 +41458,7 @@
                   <a:srgbClr val="1B3B6F"/>
                 </a:solidFill>
                 <a:latin typeface="Amiri" pitchFamily="2" charset="-78"/>
+                <a:ea typeface="Amiri" pitchFamily="2" charset="-78"/>
                 <a:cs typeface="Amiri" pitchFamily="2" charset="-78"/>
               </a:rPr>
               <a:t>إِذَا كَانَ بِإِمْكَانِكَ تَغْيِيرُ عَادَةٍ صِحِّيَّةٍ وَاحِدَةٍ، مَاذَا سَتَخْتَارُ؟</a:t>
@@ -41535,6 +41695,7 @@
                   <a:srgbClr val="D4AF37"/>
                 </a:solidFill>
                 <a:latin typeface="Amiri" pitchFamily="2" charset="-78"/>
+                <a:ea typeface="Amiri" pitchFamily="2" charset="-78"/>
                 <a:cs typeface="Amiri" pitchFamily="2" charset="-78"/>
               </a:rPr>
               <a:t>م</a:t>
@@ -41855,6 +42016,7 @@
                   <a:srgbClr val="8A6D1E"/>
                 </a:solidFill>
                 <a:latin typeface="Amiri" pitchFamily="2" charset="-78"/>
+                <a:ea typeface="Amiri" pitchFamily="2" charset="-78"/>
                 <a:cs typeface="Amiri" pitchFamily="2" charset="-78"/>
               </a:rPr>
               <a:t>مِلَفُّ المَهَارَاتِ</a:t>
@@ -43027,6 +43189,7 @@
                   <a:srgbClr val="D4AF37"/>
                 </a:solidFill>
                 <a:latin typeface="Amiri" pitchFamily="2" charset="-78"/>
+                <a:ea typeface="Amiri" pitchFamily="2" charset="-78"/>
                 <a:cs typeface="Amiri" pitchFamily="2" charset="-78"/>
               </a:rPr>
               <a:t>م</a:t>
@@ -43347,6 +43510,7 @@
                   <a:srgbClr val="8A6D1E"/>
                 </a:solidFill>
                 <a:latin typeface="Amiri" pitchFamily="2" charset="-78"/>
+                <a:ea typeface="Amiri" pitchFamily="2" charset="-78"/>
                 <a:cs typeface="Amiri" pitchFamily="2" charset="-78"/>
               </a:rPr>
               <a:t>قَيِّمْ عَمَلَكَ</a:t>
@@ -44504,6 +44668,7 @@
                   <a:srgbClr val="D4AF37"/>
                 </a:solidFill>
                 <a:latin typeface="Amiri" pitchFamily="2" charset="-78"/>
+                <a:ea typeface="Amiri" pitchFamily="2" charset="-78"/>
                 <a:cs typeface="Amiri" pitchFamily="2" charset="-78"/>
               </a:rPr>
               <a:t>م</a:t>
@@ -44824,6 +44989,7 @@
                   <a:srgbClr val="8A6D1E"/>
                 </a:solidFill>
                 <a:latin typeface="Amiri" pitchFamily="2" charset="-78"/>
+                <a:ea typeface="Amiri" pitchFamily="2" charset="-78"/>
                 <a:cs typeface="Amiri" pitchFamily="2" charset="-78"/>
               </a:rPr>
               <a:t>التَّحْضِيرُ لِلدَّرْسِ القَادِمِ</a:t>
@@ -45037,6 +45203,7 @@
                   <a:srgbClr val="1B3B6F"/>
                 </a:solidFill>
                 <a:latin typeface="Amiri" pitchFamily="2" charset="-78"/>
+                <a:ea typeface="Amiri" pitchFamily="2" charset="-78"/>
                 <a:cs typeface="Amiri" pitchFamily="2" charset="-78"/>
               </a:rPr>
               <a:t>مَنْظُومَةٌ تَعْلِيمِيَّةٌ</a:t>
@@ -45083,11 +45250,12 @@
               <a:buNone/>
             </a:pPr>
             <a:r>
-              <a:rPr lang="en-US" sz="1000" i="1" dirty="0">
+              <a:rPr lang="ar-SA" sz="1000" i="1" dirty="0">
                 <a:solidFill>
                   <a:srgbClr val="5A6472"/>
                 </a:solidFill>
                 <a:latin typeface="Calibri" pitchFamily="34" charset="0"/>
+                <a:ea typeface="Amiri" pitchFamily="2" charset="-78"/>
                 <a:cs typeface="Amiri" pitchFamily="2" charset="-78"/>
               </a:rPr>
               <a:t>  pl. مَنْظُومَاتٌ</a:t>
@@ -45126,6 +45294,7 @@
                   <a:srgbClr val="1B3B6F"/>
                 </a:solidFill>
                 <a:latin typeface="Amiri" pitchFamily="2" charset="-78"/>
+                <a:ea typeface="Amiri" pitchFamily="2" charset="-78"/>
                 <a:cs typeface="Amiri" pitchFamily="2" charset="-78"/>
               </a:rPr>
               <a:t>مَرْحَلَةٌ ثَانَوِيَّةٌ</a:t>
@@ -45172,11 +45341,12 @@
               <a:buNone/>
             </a:pPr>
             <a:r>
-              <a:rPr lang="en-US" sz="1000" i="1" dirty="0">
+              <a:rPr lang="ar-SA" sz="1000" i="1" dirty="0">
                 <a:solidFill>
                   <a:srgbClr val="5A6472"/>
                 </a:solidFill>
                 <a:latin typeface="Calibri" pitchFamily="34" charset="0"/>
+                <a:ea typeface="Amiri" pitchFamily="2" charset="-78"/>
                 <a:cs typeface="Amiri" pitchFamily="2" charset="-78"/>
               </a:rPr>
               <a:t>  pl. مَرَاحِلُ</a:t>
@@ -45215,6 +45385,7 @@
                   <a:srgbClr val="1B3B6F"/>
                 </a:solidFill>
                 <a:latin typeface="Amiri" pitchFamily="2" charset="-78"/>
+                <a:ea typeface="Amiri" pitchFamily="2" charset="-78"/>
                 <a:cs typeface="Amiri" pitchFamily="2" charset="-78"/>
               </a:rPr>
               <a:t>مَادَّةٌ إِلْزَامِيَّةٌ</a:t>
@@ -45261,11 +45432,12 @@
               <a:buNone/>
             </a:pPr>
             <a:r>
-              <a:rPr lang="en-US" sz="1000" i="1" dirty="0">
+              <a:rPr lang="ar-SA" sz="1000" i="1" dirty="0">
                 <a:solidFill>
                   <a:srgbClr val="5A6472"/>
                 </a:solidFill>
                 <a:latin typeface="Calibri" pitchFamily="34" charset="0"/>
+                <a:ea typeface="Amiri" pitchFamily="2" charset="-78"/>
                 <a:cs typeface="Amiri" pitchFamily="2" charset="-78"/>
               </a:rPr>
               <a:t>  pl. مَوَادُّ</a:t>
@@ -45304,6 +45476,7 @@
                   <a:srgbClr val="1B3B6F"/>
                 </a:solidFill>
                 <a:latin typeface="Amiri" pitchFamily="2" charset="-78"/>
+                <a:ea typeface="Amiri" pitchFamily="2" charset="-78"/>
                 <a:cs typeface="Amiri" pitchFamily="2" charset="-78"/>
               </a:rPr>
               <a:t>يَجْتَازُ</a:t>
@@ -45350,11 +45523,12 @@
               <a:buNone/>
             </a:pPr>
             <a:r>
-              <a:rPr lang="en-US" sz="1000" i="1" dirty="0">
+              <a:rPr lang="ar-SA" sz="1000" i="1" dirty="0">
                 <a:solidFill>
                   <a:srgbClr val="5A6472"/>
                 </a:solidFill>
                 <a:latin typeface="Calibri" pitchFamily="34" charset="0"/>
+                <a:ea typeface="Amiri" pitchFamily="2" charset="-78"/>
                 <a:cs typeface="Amiri" pitchFamily="2" charset="-78"/>
               </a:rPr>
               <a:t>  تَجْتَازُ she</a:t>
@@ -45393,6 +45567,7 @@
                   <a:srgbClr val="1B3B6F"/>
                 </a:solidFill>
                 <a:latin typeface="Amiri" pitchFamily="2" charset="-78"/>
+                <a:ea typeface="Amiri" pitchFamily="2" charset="-78"/>
                 <a:cs typeface="Amiri" pitchFamily="2" charset="-78"/>
               </a:rPr>
               <a:t>يَتَفَوَّقُ فِي</a:t>
@@ -45439,11 +45614,12 @@
               <a:buNone/>
             </a:pPr>
             <a:r>
-              <a:rPr lang="en-US" sz="1000" i="1" dirty="0">
+              <a:rPr lang="ar-SA" sz="1000" i="1" dirty="0">
                 <a:solidFill>
                   <a:srgbClr val="5A6472"/>
                 </a:solidFill>
                 <a:latin typeface="Calibri" pitchFamily="34" charset="0"/>
+                <a:ea typeface="Amiri" pitchFamily="2" charset="-78"/>
                 <a:cs typeface="Amiri" pitchFamily="2" charset="-78"/>
               </a:rPr>
               <a:t>  تَتَفَوَّقُ she</a:t>
@@ -45561,6 +45737,7 @@
                   <a:srgbClr val="1B3B6F"/>
                 </a:solidFill>
                 <a:latin typeface="Amiri" pitchFamily="2" charset="-78"/>
+                <a:ea typeface="Amiri" pitchFamily="2" charset="-78"/>
                 <a:cs typeface="Amiri" pitchFamily="2" charset="-78"/>
               </a:rPr>
               <a:t>أَتَفَوَّقُ فِي ______ ، وَ ______ مَادَّةٌ إِلْزَامِيَّةٌ صَعْبَةٌ عَلَيَّ.</a:t>
@@ -46230,6 +46407,7 @@
                   <a:srgbClr val="FFFFFF"/>
                 </a:solidFill>
                 <a:latin typeface="Amiri" pitchFamily="2" charset="-78"/>
+                <a:ea typeface="Amiri" pitchFamily="2" charset="-78"/>
                 <a:cs typeface="Amiri" pitchFamily="2" charset="-78"/>
               </a:rPr>
               <a:t>أَحْسَنْتُمْ! إِلَى اللِّقَاءِ</a:t>
@@ -46382,6 +46560,7 @@
                   <a:srgbClr val="D4AF37"/>
                 </a:solidFill>
                 <a:latin typeface="Amiri" pitchFamily="2" charset="-78"/>
+                <a:ea typeface="Amiri" pitchFamily="2" charset="-78"/>
                 <a:cs typeface="Amiri" pitchFamily="2" charset="-78"/>
               </a:rPr>
               <a:t>المَنْظُومَاتُ التَّعْلِيمِيَّةُ وَالحَيَاةُ الأَكَادِيمِيَّةُ</a:t>
@@ -46515,6 +46694,7 @@
                   <a:srgbClr val="D4AF37"/>
                 </a:solidFill>
                 <a:latin typeface="Amiri" pitchFamily="2" charset="-78"/>
+                <a:ea typeface="Amiri" pitchFamily="2" charset="-78"/>
                 <a:cs typeface="Amiri" pitchFamily="2" charset="-78"/>
               </a:rPr>
               <a:t>م</a:t>
@@ -46835,6 +47015,7 @@
                   <a:srgbClr val="8A6D1E"/>
                 </a:solidFill>
                 <a:latin typeface="Amiri" pitchFamily="2" charset="-78"/>
+                <a:ea typeface="Amiri" pitchFamily="2" charset="-78"/>
                 <a:cs typeface="Amiri" pitchFamily="2" charset="-78"/>
               </a:rPr>
               <a:t>خَرِيطَةُ الدَّرْسِ</a:t>
@@ -47149,6 +47330,7 @@
                   <a:srgbClr val="0E7C86"/>
                 </a:solidFill>
                 <a:latin typeface="Amiri" pitchFamily="2" charset="-78"/>
+                <a:ea typeface="Amiri" pitchFamily="2" charset="-78"/>
                 <a:cs typeface="Amiri" pitchFamily="2" charset="-78"/>
               </a:rPr>
               <a:t>تَهْيِئَةٌ</a:t>
@@ -47425,6 +47607,7 @@
                   <a:srgbClr val="1B3B6F"/>
                 </a:solidFill>
                 <a:latin typeface="Amiri" pitchFamily="2" charset="-78"/>
+                <a:ea typeface="Amiri" pitchFamily="2" charset="-78"/>
                 <a:cs typeface="Amiri" pitchFamily="2" charset="-78"/>
               </a:rPr>
               <a:t>خُطَّةُ التَّقْيِيمِ</a:t>
@@ -47701,6 +47884,7 @@
                   <a:srgbClr val="6B4C9A"/>
                 </a:solidFill>
                 <a:latin typeface="Amiri" pitchFamily="2" charset="-78"/>
+                <a:ea typeface="Amiri" pitchFamily="2" charset="-78"/>
                 <a:cs typeface="Amiri" pitchFamily="2" charset="-78"/>
               </a:rPr>
               <a:t>الاِسْتِمَاعُ</a:t>
@@ -47977,6 +48161,7 @@
                   <a:srgbClr val="2F6FB0"/>
                 </a:solidFill>
                 <a:latin typeface="Amiri" pitchFamily="2" charset="-78"/>
+                <a:ea typeface="Amiri" pitchFamily="2" charset="-78"/>
                 <a:cs typeface="Amiri" pitchFamily="2" charset="-78"/>
               </a:rPr>
               <a:t>القِرَاءَةُ</a:t>
@@ -48253,6 +48438,7 @@
                   <a:srgbClr val="1E6B52"/>
                 </a:solidFill>
                 <a:latin typeface="Amiri" pitchFamily="2" charset="-78"/>
+                <a:ea typeface="Amiri" pitchFamily="2" charset="-78"/>
                 <a:cs typeface="Amiri" pitchFamily="2" charset="-78"/>
               </a:rPr>
               <a:t>الكِتَابَةُ وَالتَّحَدُّثُ</a:t>
@@ -48529,6 +48715,7 @@
                   <a:srgbClr val="8A6D1E"/>
                 </a:solidFill>
                 <a:latin typeface="Amiri" pitchFamily="2" charset="-78"/>
+                <a:ea typeface="Amiri" pitchFamily="2" charset="-78"/>
                 <a:cs typeface="Amiri" pitchFamily="2" charset="-78"/>
               </a:rPr>
               <a:t>الهَدَفُ</a:t>
@@ -48805,6 +48992,7 @@
                   <a:srgbClr val="C45A3C"/>
                 </a:solidFill>
                 <a:latin typeface="Amiri" pitchFamily="2" charset="-78"/>
+                <a:ea typeface="Amiri" pitchFamily="2" charset="-78"/>
                 <a:cs typeface="Amiri" pitchFamily="2" charset="-78"/>
               </a:rPr>
               <a:t>اِسْتَعِدَّ</a:t>
@@ -49048,6 +49236,7 @@
                   <a:srgbClr val="D4AF37"/>
                 </a:solidFill>
                 <a:latin typeface="Amiri" pitchFamily="2" charset="-78"/>
+                <a:ea typeface="Amiri" pitchFamily="2" charset="-78"/>
                 <a:cs typeface="Amiri" pitchFamily="2" charset="-78"/>
               </a:rPr>
               <a:t>م</a:t>
@@ -49368,6 +49557,7 @@
                   <a:srgbClr val="8A6D1E"/>
                 </a:solidFill>
                 <a:latin typeface="Amiri" pitchFamily="2" charset="-78"/>
+                <a:ea typeface="Amiri" pitchFamily="2" charset="-78"/>
                 <a:cs typeface="Amiri" pitchFamily="2" charset="-78"/>
               </a:rPr>
               <a:t>اِبْدَأِ الآنَ</a:t>
@@ -49554,6 +49744,7 @@
                   <a:srgbClr val="1B3B6F"/>
                 </a:solidFill>
                 <a:latin typeface="Amiri" pitchFamily="2" charset="-78"/>
+                <a:ea typeface="Amiri" pitchFamily="2" charset="-78"/>
                 <a:cs typeface="Amiri" pitchFamily="2" charset="-78"/>
               </a:rPr>
               <a:t>فَهْمُ المَسْمُوعِ</a:t>
@@ -50018,6 +50209,7 @@
                   <a:srgbClr val="1B3B6F"/>
                 </a:solidFill>
                 <a:latin typeface="Amiri" pitchFamily="2" charset="-78"/>
+                <a:ea typeface="Amiri" pitchFamily="2" charset="-78"/>
                 <a:cs typeface="Amiri" pitchFamily="2" charset="-78"/>
               </a:rPr>
               <a:t>إِذَا</a:t>
@@ -50044,6 +50236,7 @@
                   <a:srgbClr val="1B3B6F"/>
                 </a:solidFill>
                 <a:latin typeface="Amiri" pitchFamily="2" charset="-78"/>
+                <a:ea typeface="Amiri" pitchFamily="2" charset="-78"/>
                 <a:cs typeface="Amiri" pitchFamily="2" charset="-78"/>
               </a:rPr>
               <a:t>الرِّيَاضَةَ، سَتَشْعُرُ بِتَحَسُّنٍ</a:t>
@@ -50158,6 +50351,7 @@
                   <a:srgbClr val="1F2A37"/>
                 </a:solidFill>
                 <a:latin typeface="Amiri" pitchFamily="2" charset="-78"/>
+                <a:ea typeface="Amiri" pitchFamily="2" charset="-78"/>
                 <a:cs typeface="Amiri" pitchFamily="2" charset="-78"/>
               </a:rPr>
               <a:t>مَارَسْتَ</a:t>
@@ -50259,6 +50453,7 @@
                   <a:srgbClr val="1F2A37"/>
                 </a:solidFill>
                 <a:latin typeface="Amiri" pitchFamily="2" charset="-78"/>
+                <a:ea typeface="Amiri" pitchFamily="2" charset="-78"/>
                 <a:cs typeface="Amiri" pitchFamily="2" charset="-78"/>
               </a:rPr>
               <a:t>تُمَارِسُ</a:t>
@@ -50360,6 +50555,7 @@
                   <a:srgbClr val="1F2A37"/>
                 </a:solidFill>
                 <a:latin typeface="Amiri" pitchFamily="2" charset="-78"/>
+                <a:ea typeface="Amiri" pitchFamily="2" charset="-78"/>
                 <a:cs typeface="Amiri" pitchFamily="2" charset="-78"/>
               </a:rPr>
               <a:t>سَتُمَارِسُ</a:t>
@@ -50508,6 +50704,7 @@
                   <a:srgbClr val="1B3B6F"/>
                 </a:solidFill>
                 <a:latin typeface="Amiri" pitchFamily="2" charset="-78"/>
+                <a:ea typeface="Amiri" pitchFamily="2" charset="-78"/>
                 <a:cs typeface="Amiri" pitchFamily="2" charset="-78"/>
               </a:rPr>
               <a:t>يُوصَى</a:t>
@@ -50534,6 +50731,7 @@
                   <a:srgbClr val="1B3B6F"/>
                 </a:solidFill>
                 <a:latin typeface="Amiri" pitchFamily="2" charset="-78"/>
+                <a:ea typeface="Amiri" pitchFamily="2" charset="-78"/>
                 <a:cs typeface="Amiri" pitchFamily="2" charset="-78"/>
               </a:rPr>
               <a:t>الخُضَارِ</a:t>
@@ -50648,6 +50846,7 @@
                   <a:srgbClr val="1F2A37"/>
                 </a:solidFill>
                 <a:latin typeface="Amiri" pitchFamily="2" charset="-78"/>
+                <a:ea typeface="Amiri" pitchFamily="2" charset="-78"/>
                 <a:cs typeface="Amiri" pitchFamily="2" charset="-78"/>
               </a:rPr>
               <a:t>أَنْ نَتَنَاوَلَ</a:t>
@@ -50749,6 +50948,7 @@
                   <a:srgbClr val="1F2A37"/>
                 </a:solidFill>
                 <a:latin typeface="Amiri" pitchFamily="2" charset="-78"/>
+                <a:ea typeface="Amiri" pitchFamily="2" charset="-78"/>
                 <a:cs typeface="Amiri" pitchFamily="2" charset="-78"/>
               </a:rPr>
               <a:t>تَنَاوُلَ</a:t>
@@ -50850,6 +51050,7 @@
                   <a:srgbClr val="1F2A37"/>
                 </a:solidFill>
                 <a:latin typeface="Amiri" pitchFamily="2" charset="-78"/>
+                <a:ea typeface="Amiri" pitchFamily="2" charset="-78"/>
                 <a:cs typeface="Amiri" pitchFamily="2" charset="-78"/>
               </a:rPr>
               <a:t>بِتَنَاوُلِ</a:t>
@@ -50998,6 +51199,7 @@
                   <a:srgbClr val="1B3B6F"/>
                 </a:solidFill>
                 <a:latin typeface="Amiri" pitchFamily="2" charset="-78"/>
+                <a:ea typeface="Amiri" pitchFamily="2" charset="-78"/>
                 <a:cs typeface="Amiri" pitchFamily="2" charset="-78"/>
               </a:rPr>
               <a:t>الوَجْبَةُ تَفْتَقِرُ</a:t>
@@ -51024,6 +51226,7 @@
                   <a:srgbClr val="1B3B6F"/>
                 </a:solidFill>
                 <a:latin typeface="Amiri" pitchFamily="2" charset="-78"/>
+                <a:ea typeface="Amiri" pitchFamily="2" charset="-78"/>
                 <a:cs typeface="Amiri" pitchFamily="2" charset="-78"/>
               </a:rPr>
               <a:t>الأَلْيَافِ</a:t>
@@ -51138,6 +51341,7 @@
                   <a:srgbClr val="1F2A37"/>
                 </a:solidFill>
                 <a:latin typeface="Amiri" pitchFamily="2" charset="-78"/>
+                <a:ea typeface="Amiri" pitchFamily="2" charset="-78"/>
                 <a:cs typeface="Amiri" pitchFamily="2" charset="-78"/>
               </a:rPr>
               <a:t>بِـ</a:t>
@@ -51239,6 +51443,7 @@
                   <a:srgbClr val="1F2A37"/>
                 </a:solidFill>
                 <a:latin typeface="Amiri" pitchFamily="2" charset="-78"/>
+                <a:ea typeface="Amiri" pitchFamily="2" charset="-78"/>
                 <a:cs typeface="Amiri" pitchFamily="2" charset="-78"/>
               </a:rPr>
               <a:t>مِنْ</a:t>
@@ -51340,6 +51545,7 @@
                   <a:srgbClr val="1F2A37"/>
                 </a:solidFill>
                 <a:latin typeface="Amiri" pitchFamily="2" charset="-78"/>
+                <a:ea typeface="Amiri" pitchFamily="2" charset="-78"/>
                 <a:cs typeface="Amiri" pitchFamily="2" charset="-78"/>
               </a:rPr>
               <a:t>إِلَى</a:t>
@@ -51576,6 +51782,7 @@
                   <a:srgbClr val="1F2A37"/>
                 </a:solidFill>
                 <a:latin typeface="Amiri" pitchFamily="2" charset="-78"/>
+                <a:ea typeface="Amiri" pitchFamily="2" charset="-78"/>
                 <a:cs typeface="Amiri" pitchFamily="2" charset="-78"/>
               </a:rPr>
               <a:t>عَادَاتٌ صِحِّيَّةٌ</a:t>
@@ -51677,6 +51884,7 @@
                   <a:srgbClr val="1F2A37"/>
                 </a:solidFill>
                 <a:latin typeface="Amiri" pitchFamily="2" charset="-78"/>
+                <a:ea typeface="Amiri" pitchFamily="2" charset="-78"/>
                 <a:cs typeface="Amiri" pitchFamily="2" charset="-78"/>
               </a:rPr>
               <a:t>عَادَاتٌ صِحِّيُّونَ</a:t>
@@ -51778,6 +51986,7 @@
                   <a:srgbClr val="1F2A37"/>
                 </a:solidFill>
                 <a:latin typeface="Amiri" pitchFamily="2" charset="-78"/>
+                <a:ea typeface="Amiri" pitchFamily="2" charset="-78"/>
                 <a:cs typeface="Amiri" pitchFamily="2" charset="-78"/>
               </a:rPr>
               <a:t>عَادَاتٌ صِحِّيٌّ</a:t>
@@ -52113,6 +52322,7 @@
                   <a:srgbClr val="D4AF37"/>
                 </a:solidFill>
                 <a:latin typeface="Amiri" pitchFamily="2" charset="-78"/>
+                <a:ea typeface="Amiri" pitchFamily="2" charset="-78"/>
                 <a:cs typeface="Amiri" pitchFamily="2" charset="-78"/>
               </a:rPr>
               <a:t>م</a:t>
@@ -52433,6 +52643,7 @@
                   <a:srgbClr val="8A6D1E"/>
                 </a:solidFill>
                 <a:latin typeface="Amiri" pitchFamily="2" charset="-78"/>
+                <a:ea typeface="Amiri" pitchFamily="2" charset="-78"/>
                 <a:cs typeface="Amiri" pitchFamily="2" charset="-78"/>
               </a:rPr>
               <a:t>الإِجَابَاتُ وَالتَّعْلِيلُ</a:t>
@@ -52619,6 +52830,7 @@
                   <a:srgbClr val="1B3B6F"/>
                 </a:solidFill>
                 <a:latin typeface="Amiri" pitchFamily="2" charset="-78"/>
+                <a:ea typeface="Amiri" pitchFamily="2" charset="-78"/>
                 <a:cs typeface="Amiri" pitchFamily="2" charset="-78"/>
               </a:rPr>
               <a:t>فَهْمُ المَسْمُوعِ</a:t>
@@ -53148,6 +53360,7 @@
                   <a:srgbClr val="1B3B6F"/>
                 </a:solidFill>
                 <a:latin typeface="Amiri" pitchFamily="2" charset="-78"/>
+                <a:ea typeface="Amiri" pitchFamily="2" charset="-78"/>
                 <a:cs typeface="Amiri" pitchFamily="2" charset="-78"/>
               </a:rPr>
               <a:t>إِذَا</a:t>
@@ -53174,6 +53387,7 @@
                   <a:srgbClr val="1B3B6F"/>
                 </a:solidFill>
                 <a:latin typeface="Amiri" pitchFamily="2" charset="-78"/>
+                <a:ea typeface="Amiri" pitchFamily="2" charset="-78"/>
                 <a:cs typeface="Amiri" pitchFamily="2" charset="-78"/>
               </a:rPr>
               <a:t>الرِّيَاضَةَ، سَتَشْعُرُ بِتَحَسُّنٍ</a:t>
@@ -53315,6 +53529,7 @@
                   <a:srgbClr val="1F2A37"/>
                 </a:solidFill>
                 <a:latin typeface="Amiri" pitchFamily="2" charset="-78"/>
+                <a:ea typeface="Amiri" pitchFamily="2" charset="-78"/>
                 <a:cs typeface="Amiri" pitchFamily="2" charset="-78"/>
               </a:rPr>
               <a:t>مَارَسْتَ</a:t>
@@ -53416,6 +53631,7 @@
                   <a:srgbClr val="9AA1AB"/>
                 </a:solidFill>
                 <a:latin typeface="Amiri" pitchFamily="2" charset="-78"/>
+                <a:ea typeface="Amiri" pitchFamily="2" charset="-78"/>
                 <a:cs typeface="Amiri" pitchFamily="2" charset="-78"/>
               </a:rPr>
               <a:t>تُمَارِسُ</a:t>
@@ -53517,6 +53733,7 @@
                   <a:srgbClr val="9AA1AB"/>
                 </a:solidFill>
                 <a:latin typeface="Amiri" pitchFamily="2" charset="-78"/>
+                <a:ea typeface="Amiri" pitchFamily="2" charset="-78"/>
                 <a:cs typeface="Amiri" pitchFamily="2" charset="-78"/>
               </a:rPr>
               <a:t>سَتُمَارِسُ</a:t>
@@ -53703,6 +53920,7 @@
                   <a:srgbClr val="1B3B6F"/>
                 </a:solidFill>
                 <a:latin typeface="Amiri" pitchFamily="2" charset="-78"/>
+                <a:ea typeface="Amiri" pitchFamily="2" charset="-78"/>
                 <a:cs typeface="Amiri" pitchFamily="2" charset="-78"/>
               </a:rPr>
               <a:t>يُوصَى</a:t>
@@ -53729,6 +53947,7 @@
                   <a:srgbClr val="1B3B6F"/>
                 </a:solidFill>
                 <a:latin typeface="Amiri" pitchFamily="2" charset="-78"/>
+                <a:ea typeface="Amiri" pitchFamily="2" charset="-78"/>
                 <a:cs typeface="Amiri" pitchFamily="2" charset="-78"/>
               </a:rPr>
               <a:t>الخُضَارِ</a:t>
@@ -53843,6 +54062,7 @@
                   <a:srgbClr val="9AA1AB"/>
                 </a:solidFill>
                 <a:latin typeface="Amiri" pitchFamily="2" charset="-78"/>
+                <a:ea typeface="Amiri" pitchFamily="2" charset="-78"/>
                 <a:cs typeface="Amiri" pitchFamily="2" charset="-78"/>
               </a:rPr>
               <a:t>أَنْ نَتَنَاوَلَ</a:t>
@@ -53944,6 +54164,7 @@
                   <a:srgbClr val="9AA1AB"/>
                 </a:solidFill>
                 <a:latin typeface="Amiri" pitchFamily="2" charset="-78"/>
+                <a:ea typeface="Amiri" pitchFamily="2" charset="-78"/>
                 <a:cs typeface="Amiri" pitchFamily="2" charset="-78"/>
               </a:rPr>
               <a:t>تَنَاوُلَ</a:t>
@@ -54072,6 +54293,7 @@
                   <a:srgbClr val="1F2A37"/>
                 </a:solidFill>
                 <a:latin typeface="Amiri" pitchFamily="2" charset="-78"/>
+                <a:ea typeface="Amiri" pitchFamily="2" charset="-78"/>
                 <a:cs typeface="Amiri" pitchFamily="2" charset="-78"/>
               </a:rPr>
               <a:t>بِتَنَاوُلِ</a:t>
@@ -54258,6 +54480,7 @@
                   <a:srgbClr val="1B3B6F"/>
                 </a:solidFill>
                 <a:latin typeface="Amiri" pitchFamily="2" charset="-78"/>
+                <a:ea typeface="Amiri" pitchFamily="2" charset="-78"/>
                 <a:cs typeface="Amiri" pitchFamily="2" charset="-78"/>
               </a:rPr>
               <a:t>الوَجْبَةُ تَفْتَقِرُ</a:t>
@@ -54284,6 +54507,7 @@
                   <a:srgbClr val="1B3B6F"/>
                 </a:solidFill>
                 <a:latin typeface="Amiri" pitchFamily="2" charset="-78"/>
+                <a:ea typeface="Amiri" pitchFamily="2" charset="-78"/>
                 <a:cs typeface="Amiri" pitchFamily="2" charset="-78"/>
               </a:rPr>
               <a:t>الأَلْيَافِ</a:t>
@@ -54398,6 +54622,7 @@
                   <a:srgbClr val="9AA1AB"/>
                 </a:solidFill>
                 <a:latin typeface="Amiri" pitchFamily="2" charset="-78"/>
+                <a:ea typeface="Amiri" pitchFamily="2" charset="-78"/>
                 <a:cs typeface="Amiri" pitchFamily="2" charset="-78"/>
               </a:rPr>
               <a:t>بِـ</a:t>
@@ -54499,6 +54724,7 @@
                   <a:srgbClr val="9AA1AB"/>
                 </a:solidFill>
                 <a:latin typeface="Amiri" pitchFamily="2" charset="-78"/>
+                <a:ea typeface="Amiri" pitchFamily="2" charset="-78"/>
                 <a:cs typeface="Amiri" pitchFamily="2" charset="-78"/>
               </a:rPr>
               <a:t>مِنْ</a:t>
@@ -54627,6 +54853,7 @@
                   <a:srgbClr val="1F2A37"/>
                 </a:solidFill>
                 <a:latin typeface="Amiri" pitchFamily="2" charset="-78"/>
+                <a:ea typeface="Amiri" pitchFamily="2" charset="-78"/>
                 <a:cs typeface="Amiri" pitchFamily="2" charset="-78"/>
               </a:rPr>
               <a:t>إِلَى</a:t>
@@ -54928,6 +55155,7 @@
                   <a:srgbClr val="1F2A37"/>
                 </a:solidFill>
                 <a:latin typeface="Amiri" pitchFamily="2" charset="-78"/>
+                <a:ea typeface="Amiri" pitchFamily="2" charset="-78"/>
                 <a:cs typeface="Amiri" pitchFamily="2" charset="-78"/>
               </a:rPr>
               <a:t>عَادَاتٌ صِحِّيَّةٌ</a:t>
@@ -55029,6 +55257,7 @@
                   <a:srgbClr val="9AA1AB"/>
                 </a:solidFill>
                 <a:latin typeface="Amiri" pitchFamily="2" charset="-78"/>
+                <a:ea typeface="Amiri" pitchFamily="2" charset="-78"/>
                 <a:cs typeface="Amiri" pitchFamily="2" charset="-78"/>
               </a:rPr>
               <a:t>عَادَاتٌ صِحِّيُّونَ</a:t>
@@ -55130,6 +55359,7 @@
                   <a:srgbClr val="9AA1AB"/>
                 </a:solidFill>
                 <a:latin typeface="Amiri" pitchFamily="2" charset="-78"/>
+                <a:ea typeface="Amiri" pitchFamily="2" charset="-78"/>
                 <a:cs typeface="Amiri" pitchFamily="2" charset="-78"/>
               </a:rPr>
               <a:t>عَادَاتٌ صِحِّيٌّ</a:t>
@@ -55319,6 +55549,7 @@
                   <a:srgbClr val="1B3B6F"/>
                 </a:solidFill>
                 <a:latin typeface="Amiri" pitchFamily="2" charset="-78"/>
+                <a:ea typeface="Amiri" pitchFamily="2" charset="-78"/>
                 <a:cs typeface="Amiri" pitchFamily="2" charset="-78"/>
               </a:rPr>
               <a:t>حَرْفُ الجَرِّ · الشَّرْطُ · المَجْهُولُ · أَنَّ · المُطَابَقَةُ</a:t>
@@ -55452,6 +55683,7 @@
                   <a:srgbClr val="D4AF37"/>
                 </a:solidFill>
                 <a:latin typeface="Amiri" pitchFamily="2" charset="-78"/>
+                <a:ea typeface="Amiri" pitchFamily="2" charset="-78"/>
                 <a:cs typeface="Amiri" pitchFamily="2" charset="-78"/>
               </a:rPr>
               <a:t>م</a:t>
@@ -55772,6 +56004,7 @@
                   <a:srgbClr val="8A6D1E"/>
                 </a:solidFill>
                 <a:latin typeface="Amiri" pitchFamily="2" charset="-78"/>
+                <a:ea typeface="Amiri" pitchFamily="2" charset="-78"/>
                 <a:cs typeface="Amiri" pitchFamily="2" charset="-78"/>
               </a:rPr>
               <a:t>مُرَاجَعَةُ القَوَاعِدِ</a:t>
@@ -56052,6 +56285,7 @@
                   <a:srgbClr val="1B3B6F"/>
                 </a:solidFill>
                 <a:latin typeface="Amiri" pitchFamily="2" charset="-78"/>
+                <a:ea typeface="Amiri" pitchFamily="2" charset="-78"/>
                 <a:cs typeface="Amiri" pitchFamily="2" charset="-78"/>
               </a:rPr>
               <a:t>غَنِيٌّ بِالبُرُوتِينِ · تَفْتَقِرُ إِلَى الأَلْيَافِ · أُعَانِي مِنَ التَّوَتُّرِ</a:t>
@@ -56258,6 +56492,7 @@
                   <a:srgbClr val="1B3B6F"/>
                 </a:solidFill>
                 <a:latin typeface="Amiri" pitchFamily="2" charset="-78"/>
+                <a:ea typeface="Amiri" pitchFamily="2" charset="-78"/>
                 <a:cs typeface="Amiri" pitchFamily="2" charset="-78"/>
               </a:rPr>
               <a:t>إِذَا مَارَسْتَ الرِّيَاضَةَ، سَتَنْخَفِضُ نِسْبَةُ التَّوَتُّرِ</a:t>
@@ -56464,6 +56699,7 @@
                   <a:srgbClr val="1B3B6F"/>
                 </a:solidFill>
                 <a:latin typeface="Amiri" pitchFamily="2" charset="-78"/>
+                <a:ea typeface="Amiri" pitchFamily="2" charset="-78"/>
                 <a:cs typeface="Amiri" pitchFamily="2" charset="-78"/>
               </a:rPr>
               <a:t>يُشَخَّصُ المَرِيضُ · يُوصَى بِتَنَاوُلِ الخُضَارِ</a:t>
@@ -56670,6 +56906,7 @@
                   <a:srgbClr val="1B3B6F"/>
                 </a:solidFill>
                 <a:latin typeface="Amiri" pitchFamily="2" charset="-78"/>
+                <a:ea typeface="Amiri" pitchFamily="2" charset="-78"/>
                 <a:cs typeface="Amiri" pitchFamily="2" charset="-78"/>
               </a:rPr>
               <a:t>النَّوْمُ يُقَوِّي التَّرْكِيزَ · النَّوْمُ أَنْفَعُ مِنَ السَّهَرِ</a:t>
@@ -56811,6 +57048,7 @@
                   <a:srgbClr val="1B3B6F"/>
                 </a:solidFill>
                 <a:latin typeface="Amiri" pitchFamily="2" charset="-78"/>
+                <a:ea typeface="Amiri" pitchFamily="2" charset="-78"/>
                 <a:cs typeface="Amiri" pitchFamily="2" charset="-78"/>
               </a:rPr>
               <a:t>هَلْ تَعْلَمُ أَنَّ النَّوْمَ … · عَادَاتٌ صِحِّيَّةٌ</a:t>
@@ -57020,6 +57258,7 @@
                   <a:srgbClr val="D4AF37"/>
                 </a:solidFill>
                 <a:latin typeface="Amiri" pitchFamily="2" charset="-78"/>
+                <a:ea typeface="Amiri" pitchFamily="2" charset="-78"/>
                 <a:cs typeface="Amiri" pitchFamily="2" charset="-78"/>
               </a:rPr>
               <a:t>م</a:t>
@@ -57340,6 +57579,7 @@
                   <a:srgbClr val="8A6D1E"/>
                 </a:solidFill>
                 <a:latin typeface="Amiri" pitchFamily="2" charset="-78"/>
+                <a:ea typeface="Amiri" pitchFamily="2" charset="-78"/>
                 <a:cs typeface="Amiri" pitchFamily="2" charset="-78"/>
               </a:rPr>
               <a:t>خُطَّةُ التَّقْيِيمِ</a:t>
@@ -58474,6 +58714,7 @@
                   <a:srgbClr val="D4AF37"/>
                 </a:solidFill>
                 <a:latin typeface="Amiri" pitchFamily="2" charset="-78"/>
+                <a:ea typeface="Amiri" pitchFamily="2" charset="-78"/>
                 <a:cs typeface="Amiri" pitchFamily="2" charset="-78"/>
               </a:rPr>
               <a:t>م</a:t>
@@ -58794,6 +59035,7 @@
                   <a:srgbClr val="8A6D1E"/>
                 </a:solidFill>
                 <a:latin typeface="Amiri" pitchFamily="2" charset="-78"/>
+                <a:ea typeface="Amiri" pitchFamily="2" charset="-78"/>
                 <a:cs typeface="Amiri" pitchFamily="2" charset="-78"/>
               </a:rPr>
               <a:t>الاِسْتِمَاعُ</a:t>
@@ -60717,6 +60959,7 @@
                   <a:srgbClr val="D4AF37"/>
                 </a:solidFill>
                 <a:latin typeface="Amiri" pitchFamily="2" charset="-78"/>
+                <a:ea typeface="Amiri" pitchFamily="2" charset="-78"/>
                 <a:cs typeface="Amiri" pitchFamily="2" charset="-78"/>
               </a:rPr>
               <a:t>م</a:t>
@@ -61037,6 +61280,7 @@
                   <a:srgbClr val="8A6D1E"/>
                 </a:solidFill>
                 <a:latin typeface="Amiri" pitchFamily="2" charset="-78"/>
+                <a:ea typeface="Amiri" pitchFamily="2" charset="-78"/>
                 <a:cs typeface="Amiri" pitchFamily="2" charset="-78"/>
               </a:rPr>
               <a:t>الإِجَابَاتُ</a:t>
@@ -61578,6 +61822,7 @@
                   <a:srgbClr val="8A6D1E"/>
                 </a:solidFill>
                 <a:latin typeface="Amiri" pitchFamily="2" charset="-78"/>
+                <a:ea typeface="Amiri" pitchFamily="2" charset="-78"/>
                 <a:cs typeface="Amiri" pitchFamily="2" charset="-78"/>
               </a:rPr>
               <a:t>غَنِيٌّ بِالخُضَارِ وَالبُرُوتِينِ.</a:t>
@@ -62081,6 +62326,7 @@
                   <a:srgbClr val="8A6D1E"/>
                 </a:solidFill>
                 <a:latin typeface="Amiri" pitchFamily="2" charset="-78"/>
+                <a:ea typeface="Amiri" pitchFamily="2" charset="-78"/>
                 <a:cs typeface="Amiri" pitchFamily="2" charset="-78"/>
               </a:rPr>
               <a:t>يَحْتَوِي عَلَى أَلْيَافٍ كَثِيرَةٍ.</a:t>
@@ -62584,6 +62830,7 @@
                   <a:srgbClr val="8A6D1E"/>
                 </a:solidFill>
                 <a:latin typeface="Amiri" pitchFamily="2" charset="-78"/>
+                <a:ea typeface="Amiri" pitchFamily="2" charset="-78"/>
                 <a:cs typeface="Amiri" pitchFamily="2" charset="-78"/>
               </a:rPr>
               <a:t>يُوصَى بِتَنَاوُلِ خَمْسِ حِصَصٍ … يَوْمِيًّا.</a:t>
@@ -63087,6 +63334,7 @@
                   <a:srgbClr val="8A6D1E"/>
                 </a:solidFill>
                 <a:latin typeface="Amiri" pitchFamily="2" charset="-78"/>
+                <a:ea typeface="Amiri" pitchFamily="2" charset="-78"/>
                 <a:cs typeface="Amiri" pitchFamily="2" charset="-78"/>
               </a:rPr>
               <a:t>بِنِسْبَةِ ثَلَاثِينَ بِالْمِئَةِ = 30%.</a:t>
@@ -63185,13 +63433,9 @@
     <a:fontScheme name="Office">
       <a:majorFont>
         <a:latin typeface="Calibri Light" panose="020F0302020204030204"/>
-        <a:ea typeface=""/>
-        <a:cs typeface=""/>
-        <a:font script="Jpan" typeface="游ゴシック Light"/>
-        <a:font script="Hang" typeface="맑은 고딕"/>
-        <a:font script="Hans" typeface="等线 Light"/>
-        <a:font script="Hant" typeface="新細明體"/>
-        <a:font script="Arab" typeface="Times New Roman"/>
+        <a:ea typeface="Amiri" pitchFamily="2" charset="-78"/>
+        <a:cs typeface="Amiri" pitchFamily="2" charset="-78"/>
+        <a:font script="Arab" typeface="Amiri"/>
         <a:font script="Hebr" typeface="Times New Roman"/>
         <a:font script="Thai" typeface="Angsana New"/>
         <a:font script="Ethi" typeface="Nyala"/>
@@ -63237,13 +63481,9 @@
       </a:majorFont>
       <a:minorFont>
         <a:latin typeface="Calibri" panose="020F0502020204030204"/>
-        <a:ea typeface=""/>
-        <a:cs typeface=""/>
-        <a:font script="Jpan" typeface="游ゴシック"/>
-        <a:font script="Hang" typeface="맑은 고딕"/>
-        <a:font script="Hans" typeface="等线"/>
-        <a:font script="Hant" typeface="新細明體"/>
-        <a:font script="Arab" typeface="Arial"/>
+        <a:ea typeface="Amiri" pitchFamily="2" charset="-78"/>
+        <a:cs typeface="Amiri" pitchFamily="2" charset="-78"/>
+        <a:font script="Arab" typeface="Amiri"/>
         <a:font script="Hebr" typeface="Arial"/>
         <a:font script="Thai" typeface="Cordia New"/>
         <a:font script="Ethi" typeface="Nyala"/>
